--- a/harness/out/pptx/pitch_deck/warm/deck.pptx
+++ b/harness/out/pptx/pitch_deck/warm/deck.pptx
@@ -11,7 +11,7 @@
     <p:sldId id="259" r:id="rId10"/>
     <p:sldId id="260" r:id="rId11"/>
   </p:sldIdLst>
-  <p:sldSz cx="9144000" cy="6858000" type="screen4x3"/>
+  <p:sldSz cx="9144000" cy="9144000" type="screen4x3"/>
   <p:notesSz cx="6858000" cy="9144000"/>
   <p:defaultTextStyle>
     <a:defPPr>
@@ -3088,7 +3088,7 @@
     <p:bg>
       <p:bgPr>
         <a:solidFill>
-          <a:srgbClr val="FFFFFF"/>
+          <a:srgbClr val="14141E"/>
         </a:solidFill>
         <a:effectLst/>
       </p:bgPr>
@@ -3108,8 +3108,8 @@
         </p:nvSpPr>
         <p:spPr>
           <a:xfrm>
-            <a:off x="457200" y="457200"/>
-            <a:ext cx="8229600" cy="914400"/>
+            <a:off x="457200" y="3200400"/>
+            <a:ext cx="8229600" cy="1371600"/>
           </a:xfrm>
           <a:prstGeom prst="rect">
             <a:avLst/>
@@ -3122,14 +3122,15 @@
           </a:bodyPr>
           <a:lstStyle/>
           <a:p>
-            <a:pPr algn="r"/>
-            <a:r>
-              <a:rPr sz="4400" b="1">
+            <a:pPr algn="ctr">
+              <a:defRPr sz="5400" b="1">
                 <a:solidFill>
-                  <a:srgbClr val="19375F"/>
+                  <a:srgbClr val="4287F5"/>
                 </a:solidFill>
                 <a:latin typeface="Consolas"/>
-              </a:rPr>
+              </a:defRPr>
+            </a:pPr>
+            <a:r>
               <a:t>Marrow</a:t>
             </a:r>
           </a:p>
@@ -3143,8 +3144,8 @@
         </p:nvSpPr>
         <p:spPr>
           <a:xfrm>
-            <a:off x="457200" y="1463040"/>
-            <a:ext cx="8229600" cy="914400"/>
+            <a:off x="457200" y="4754880"/>
+            <a:ext cx="8229600" cy="1828800"/>
           </a:xfrm>
           <a:prstGeom prst="rect">
             <a:avLst/>
@@ -3157,14 +3158,15 @@
           </a:bodyPr>
           <a:lstStyle/>
           <a:p>
-            <a:pPr algn="r"/>
-            <a:r>
-              <a:rPr sz="2400" b="0">
+            <a:pPr algn="ctr">
+              <a:defRPr sz="2800">
                 <a:solidFill>
-                  <a:srgbClr val="4287F5"/>
+                  <a:srgbClr val="DCDCDC"/>
                 </a:solidFill>
                 <a:latin typeface="Consolas"/>
-              </a:rPr>
+              </a:defRPr>
+            </a:pPr>
+            <a:r>
               <a:t>Know what your tests actually cover.</a:t>
             </a:r>
           </a:p>
@@ -3184,7 +3186,7 @@
     <p:bg>
       <p:bgPr>
         <a:solidFill>
-          <a:srgbClr val="FFFFFF"/>
+          <a:srgbClr val="14141E"/>
         </a:solidFill>
         <a:effectLst/>
       </p:bgPr>
@@ -3204,7 +3206,7 @@
         </p:nvSpPr>
         <p:spPr>
           <a:xfrm>
-            <a:off x="457200" y="457200"/>
+            <a:off x="457200" y="731520"/>
             <a:ext cx="8229600" cy="914400"/>
           </a:xfrm>
           <a:prstGeom prst="rect">
@@ -3218,14 +3220,15 @@
           </a:bodyPr>
           <a:lstStyle/>
           <a:p>
-            <a:pPr algn="r"/>
-            <a:r>
-              <a:rPr sz="4400" b="1">
+            <a:pPr>
+              <a:defRPr sz="4000" b="1">
                 <a:solidFill>
-                  <a:srgbClr val="19375F"/>
+                  <a:srgbClr val="4287F5"/>
                 </a:solidFill>
                 <a:latin typeface="Consolas"/>
-              </a:rPr>
+              </a:defRPr>
+            </a:pPr>
+            <a:r>
               <a:t>The Problem</a:t>
             </a:r>
           </a:p>
@@ -3233,14 +3236,56 @@
       </p:sp>
       <p:sp>
         <p:nvSpPr>
-          <p:cNvPr id="3" name="TextBox 2"/>
+          <p:cNvPr id="3" name="Rectangle 2"/>
+          <p:cNvSpPr/>
+          <p:nvPr/>
+        </p:nvSpPr>
+        <p:spPr>
+          <a:xfrm>
+            <a:off x="457200" y="1828800"/>
+            <a:ext cx="1828800" cy="0"/>
+          </a:xfrm>
+          <a:prstGeom prst="rect">
+            <a:avLst/>
+          </a:prstGeom>
+          <a:ln w="25400">
+            <a:solidFill>
+              <a:srgbClr val="4287F5"/>
+            </a:solidFill>
+          </a:ln>
+        </p:spPr>
+        <p:style>
+          <a:lnRef idx="1">
+            <a:schemeClr val="accent1"/>
+          </a:lnRef>
+          <a:fillRef idx="3">
+            <a:schemeClr val="accent1"/>
+          </a:fillRef>
+          <a:effectRef idx="2">
+            <a:schemeClr val="accent1"/>
+          </a:effectRef>
+          <a:fontRef idx="minor">
+            <a:schemeClr val="lt1"/>
+          </a:fontRef>
+        </p:style>
+        <p:txBody>
+          <a:bodyPr rtlCol="0" anchor="ctr"/>
+          <a:lstStyle/>
+          <a:p>
+            <a:pPr algn="ctr"/>
+          </a:p>
+        </p:txBody>
+      </p:sp>
+      <p:sp>
+        <p:nvSpPr>
+          <p:cNvPr id="4" name="TextBox 3"/>
           <p:cNvSpPr txBox="1"/>
           <p:nvPr/>
         </p:nvSpPr>
         <p:spPr>
           <a:xfrm>
-            <a:off x="731520" y="1828800"/>
-            <a:ext cx="7680960" cy="4114800"/>
+            <a:off x="731520" y="2286000"/>
+            <a:ext cx="7680960" cy="5943600"/>
           </a:xfrm>
           <a:prstGeom prst="rect">
             <a:avLst/>
@@ -3253,69 +3298,57 @@
           </a:bodyPr>
           <a:lstStyle/>
           <a:p>
-            <a:pPr/>
-            <a:r>
-              <a:rPr sz="1800" b="0">
+            <a:pPr>
+              <a:spcBef>
+                <a:spcPts val="600"/>
+              </a:spcBef>
+              <a:spcAft>
+                <a:spcPts val="600"/>
+              </a:spcAft>
+              <a:defRPr sz="2000">
                 <a:solidFill>
-                  <a:srgbClr val="19375F"/>
+                  <a:srgbClr val="DCDCDC"/>
                 </a:solidFill>
                 <a:latin typeface="Consolas"/>
-              </a:rPr>
-              <a:t>• Big test suites hide their gaps</a:t>
-            </a:r>
-          </a:p>
-          <a:p>
-            <a:pPr/>
-          </a:p>
-          <a:p>
-            <a:pPr/>
-            <a:r>
-              <a:rPr sz="1800" b="0">
+              </a:defRPr>
+            </a:pPr>
+            <a:r>
+              <a:t>Big test suites hide their gaps.</a:t>
+            </a:r>
+          </a:p>
+          <a:p>
+            <a:pPr>
+              <a:spcBef>
+                <a:spcPts val="600"/>
+              </a:spcBef>
+              <a:spcAft>
+                <a:spcPts val="600"/>
+              </a:spcAft>
+              <a:defRPr sz="2000">
                 <a:solidFill>
-                  <a:srgbClr val="19375F"/>
+                  <a:srgbClr val="DCDCDC"/>
                 </a:solidFill>
                 <a:latin typeface="Consolas"/>
-              </a:rPr>
-              <a:t>• Large suites are slow and nobody knows</a:t>
-            </a:r>
-          </a:p>
-          <a:p>
-            <a:pPr/>
-            <a:r>
-              <a:rPr sz="1800" b="0">
+              </a:defRPr>
+            </a:pPr>
+          </a:p>
+          <a:p>
+            <a:pPr>
+              <a:spcBef>
+                <a:spcPts val="600"/>
+              </a:spcBef>
+              <a:spcAft>
+                <a:spcPts val="600"/>
+              </a:spcAft>
+              <a:defRPr sz="2000">
                 <a:solidFill>
-                  <a:srgbClr val="19375F"/>
+                  <a:srgbClr val="DCDCDC"/>
                 </a:solidFill>
                 <a:latin typeface="Consolas"/>
-              </a:rPr>
-              <a:t>  which tests cover which code</a:t>
-            </a:r>
-          </a:p>
-          <a:p>
-            <a:pPr/>
-          </a:p>
-          <a:p>
-            <a:pPr/>
-            <a:r>
-              <a:rPr sz="1800" b="0">
-                <a:solidFill>
-                  <a:srgbClr val="19375F"/>
-                </a:solidFill>
-                <a:latin typeface="Consolas"/>
-              </a:rPr>
-              <a:t>• Dead tests linger and real gaps</a:t>
-            </a:r>
-          </a:p>
-          <a:p>
-            <a:pPr/>
-            <a:r>
-              <a:rPr sz="1800" b="0">
-                <a:solidFill>
-                  <a:srgbClr val="19375F"/>
-                </a:solidFill>
-                <a:latin typeface="Consolas"/>
-              </a:rPr>
-              <a:t>  go unnoticed</a:t>
+              </a:defRPr>
+            </a:pPr>
+            <a:r>
+              <a:t>Large suites are slow and nobody knows which tests cover which code, so dead tests linger and real gaps go unnoticed.</a:t>
             </a:r>
           </a:p>
         </p:txBody>
@@ -3334,7 +3367,7 @@
     <p:bg>
       <p:bgPr>
         <a:solidFill>
-          <a:srgbClr val="FFFFFF"/>
+          <a:srgbClr val="14141E"/>
         </a:solidFill>
         <a:effectLst/>
       </p:bgPr>
@@ -3354,7 +3387,7 @@
         </p:nvSpPr>
         <p:spPr>
           <a:xfrm>
-            <a:off x="457200" y="457200"/>
+            <a:off x="457200" y="731520"/>
             <a:ext cx="8229600" cy="914400"/>
           </a:xfrm>
           <a:prstGeom prst="rect">
@@ -3368,14 +3401,15 @@
           </a:bodyPr>
           <a:lstStyle/>
           <a:p>
-            <a:pPr algn="r"/>
-            <a:r>
-              <a:rPr sz="4400" b="1">
+            <a:pPr>
+              <a:defRPr sz="4000" b="1">
                 <a:solidFill>
-                  <a:srgbClr val="19375F"/>
+                  <a:srgbClr val="4287F5"/>
                 </a:solidFill>
                 <a:latin typeface="Consolas"/>
-              </a:rPr>
+              </a:defRPr>
+            </a:pPr>
+            <a:r>
               <a:t>The Idea</a:t>
             </a:r>
           </a:p>
@@ -3383,14 +3417,56 @@
       </p:sp>
       <p:sp>
         <p:nvSpPr>
-          <p:cNvPr id="3" name="TextBox 2"/>
+          <p:cNvPr id="3" name="Rectangle 2"/>
+          <p:cNvSpPr/>
+          <p:nvPr/>
+        </p:nvSpPr>
+        <p:spPr>
+          <a:xfrm>
+            <a:off x="457200" y="1828800"/>
+            <a:ext cx="1828800" cy="0"/>
+          </a:xfrm>
+          <a:prstGeom prst="rect">
+            <a:avLst/>
+          </a:prstGeom>
+          <a:ln w="25400">
+            <a:solidFill>
+              <a:srgbClr val="4287F5"/>
+            </a:solidFill>
+          </a:ln>
+        </p:spPr>
+        <p:style>
+          <a:lnRef idx="1">
+            <a:schemeClr val="accent1"/>
+          </a:lnRef>
+          <a:fillRef idx="3">
+            <a:schemeClr val="accent1"/>
+          </a:fillRef>
+          <a:effectRef idx="2">
+            <a:schemeClr val="accent1"/>
+          </a:effectRef>
+          <a:fontRef idx="minor">
+            <a:schemeClr val="lt1"/>
+          </a:fontRef>
+        </p:style>
+        <p:txBody>
+          <a:bodyPr rtlCol="0" anchor="ctr"/>
+          <a:lstStyle/>
+          <a:p>
+            <a:pPr algn="ctr"/>
+          </a:p>
+        </p:txBody>
+      </p:sp>
+      <p:sp>
+        <p:nvSpPr>
+          <p:cNvPr id="4" name="TextBox 3"/>
           <p:cNvSpPr txBox="1"/>
           <p:nvPr/>
         </p:nvSpPr>
         <p:spPr>
           <a:xfrm>
-            <a:off x="731520" y="1828800"/>
-            <a:ext cx="7680960" cy="4114800"/>
+            <a:off x="731520" y="2286000"/>
+            <a:ext cx="7680960" cy="5943600"/>
           </a:xfrm>
           <a:prstGeom prst="rect">
             <a:avLst/>
@@ -3403,60 +3479,57 @@
           </a:bodyPr>
           <a:lstStyle/>
           <a:p>
-            <a:pPr/>
-            <a:r>
-              <a:rPr sz="1800" b="0">
+            <a:pPr>
+              <a:spcBef>
+                <a:spcPts val="600"/>
+              </a:spcBef>
+              <a:spcAft>
+                <a:spcPts val="600"/>
+              </a:spcAft>
+              <a:defRPr sz="2000">
                 <a:solidFill>
-                  <a:srgbClr val="19375F"/>
+                  <a:srgbClr val="DCDCDC"/>
                 </a:solidFill>
                 <a:latin typeface="Consolas"/>
-              </a:rPr>
+              </a:defRPr>
+            </a:pPr>
+            <a:r>
               <a:t>Watch one run. Draw the real map.</a:t>
             </a:r>
           </a:p>
           <a:p>
-            <a:pPr/>
-          </a:p>
-          <a:p>
-            <a:pPr/>
-            <a:r>
-              <a:rPr sz="1800" b="0">
+            <a:pPr>
+              <a:spcBef>
+                <a:spcPts val="600"/>
+              </a:spcBef>
+              <a:spcAft>
+                <a:spcPts val="600"/>
+              </a:spcAft>
+              <a:defRPr sz="2000">
                 <a:solidFill>
-                  <a:srgbClr val="19375F"/>
+                  <a:srgbClr val="DCDCDC"/>
                 </a:solidFill>
                 <a:latin typeface="Consolas"/>
-              </a:rPr>
-              <a:t>• Marrow instruments a single test run</a:t>
-            </a:r>
-          </a:p>
-          <a:p>
-            <a:pPr/>
-          </a:p>
-          <a:p>
-            <a:pPr/>
-            <a:r>
-              <a:rPr sz="1800" b="0">
+              </a:defRPr>
+            </a:pPr>
+          </a:p>
+          <a:p>
+            <a:pPr>
+              <a:spcBef>
+                <a:spcPts val="600"/>
+              </a:spcBef>
+              <a:spcAft>
+                <a:spcPts val="600"/>
+              </a:spcAft>
+              <a:defRPr sz="2000">
                 <a:solidFill>
-                  <a:srgbClr val="19375F"/>
+                  <a:srgbClr val="DCDCDC"/>
                 </a:solidFill>
                 <a:latin typeface="Consolas"/>
-              </a:rPr>
-              <a:t>• Produces a test→code coverage map</a:t>
-            </a:r>
-          </a:p>
-          <a:p>
-            <a:pPr/>
-          </a:p>
-          <a:p>
-            <a:pPr/>
-            <a:r>
-              <a:rPr sz="1800" b="0">
-                <a:solidFill>
-                  <a:srgbClr val="19375F"/>
-                </a:solidFill>
-                <a:latin typeface="Consolas"/>
-              </a:rPr>
-              <a:t>• No annotations, no config needed</a:t>
+              </a:defRPr>
+            </a:pPr>
+            <a:r>
+              <a:t>Marrow instruments a single test run and produces a test→code coverage map — no annotations, no config.</a:t>
             </a:r>
           </a:p>
         </p:txBody>
@@ -3475,7 +3548,7 @@
     <p:bg>
       <p:bgPr>
         <a:solidFill>
-          <a:srgbClr val="FFFFFF"/>
+          <a:srgbClr val="14141E"/>
         </a:solidFill>
         <a:effectLst/>
       </p:bgPr>
@@ -3495,7 +3568,7 @@
         </p:nvSpPr>
         <p:spPr>
           <a:xfrm>
-            <a:off x="457200" y="457200"/>
+            <a:off x="457200" y="731520"/>
             <a:ext cx="8229600" cy="914400"/>
           </a:xfrm>
           <a:prstGeom prst="rect">
@@ -3509,14 +3582,15 @@
           </a:bodyPr>
           <a:lstStyle/>
           <a:p>
-            <a:pPr algn="r"/>
-            <a:r>
-              <a:rPr sz="4400" b="1">
+            <a:pPr>
+              <a:defRPr sz="4000" b="1">
                 <a:solidFill>
-                  <a:srgbClr val="19375F"/>
+                  <a:srgbClr val="4287F5"/>
                 </a:solidFill>
                 <a:latin typeface="Consolas"/>
-              </a:rPr>
+              </a:defRPr>
+            </a:pPr>
+            <a:r>
               <a:t>How It Works</a:t>
             </a:r>
           </a:p>
@@ -3524,14 +3598,56 @@
       </p:sp>
       <p:sp>
         <p:nvSpPr>
-          <p:cNvPr id="3" name="TextBox 2"/>
+          <p:cNvPr id="3" name="Rectangle 2"/>
+          <p:cNvSpPr/>
+          <p:nvPr/>
+        </p:nvSpPr>
+        <p:spPr>
+          <a:xfrm>
+            <a:off x="457200" y="1828800"/>
+            <a:ext cx="1828800" cy="0"/>
+          </a:xfrm>
+          <a:prstGeom prst="rect">
+            <a:avLst/>
+          </a:prstGeom>
+          <a:ln w="25400">
+            <a:solidFill>
+              <a:srgbClr val="4287F5"/>
+            </a:solidFill>
+          </a:ln>
+        </p:spPr>
+        <p:style>
+          <a:lnRef idx="1">
+            <a:schemeClr val="accent1"/>
+          </a:lnRef>
+          <a:fillRef idx="3">
+            <a:schemeClr val="accent1"/>
+          </a:fillRef>
+          <a:effectRef idx="2">
+            <a:schemeClr val="accent1"/>
+          </a:effectRef>
+          <a:fontRef idx="minor">
+            <a:schemeClr val="lt1"/>
+          </a:fontRef>
+        </p:style>
+        <p:txBody>
+          <a:bodyPr rtlCol="0" anchor="ctr"/>
+          <a:lstStyle/>
+          <a:p>
+            <a:pPr algn="ctr"/>
+          </a:p>
+        </p:txBody>
+      </p:sp>
+      <p:sp>
+        <p:nvSpPr>
+          <p:cNvPr id="4" name="TextBox 3"/>
           <p:cNvSpPr txBox="1"/>
           <p:nvPr/>
         </p:nvSpPr>
         <p:spPr>
           <a:xfrm>
-            <a:off x="731520" y="1828800"/>
-            <a:ext cx="7680960" cy="4114800"/>
+            <a:off x="731520" y="2286000"/>
+            <a:ext cx="7680960" cy="5943600"/>
           </a:xfrm>
           <a:prstGeom prst="rect">
             <a:avLst/>
@@ -3544,69 +3660,92 @@
           </a:bodyPr>
           <a:lstStyle/>
           <a:p>
-            <a:pPr/>
-            <a:r>
-              <a:rPr sz="1800" b="0">
+            <a:pPr>
+              <a:spcBef>
+                <a:spcPts val="600"/>
+              </a:spcBef>
+              <a:spcAft>
+                <a:spcPts val="600"/>
+              </a:spcAft>
+              <a:defRPr sz="2000">
                 <a:solidFill>
-                  <a:srgbClr val="19375F"/>
+                  <a:srgbClr val="DCDCDC"/>
                 </a:solidFill>
                 <a:latin typeface="Consolas"/>
-              </a:rPr>
+              </a:defRPr>
+            </a:pPr>
+            <a:r>
               <a:t>1. Run: marrow watch -- &lt;your test cmd&gt;</a:t>
             </a:r>
           </a:p>
           <a:p>
-            <a:pPr/>
-          </a:p>
-          <a:p>
-            <a:pPr/>
-            <a:r>
-              <a:rPr sz="1800" b="0">
+            <a:pPr>
+              <a:spcBef>
+                <a:spcPts val="600"/>
+              </a:spcBef>
+              <a:spcAft>
+                <a:spcPts val="600"/>
+              </a:spcAft>
+              <a:defRPr sz="2000">
                 <a:solidFill>
-                  <a:srgbClr val="19375F"/>
+                  <a:srgbClr val="DCDCDC"/>
                 </a:solidFill>
                 <a:latin typeface="Consolas"/>
-              </a:rPr>
-              <a:t>2. Marrow records which lines each test</a:t>
-            </a:r>
-          </a:p>
-          <a:p>
-            <a:pPr/>
-            <a:r>
-              <a:rPr sz="1800" b="0">
+              </a:defRPr>
+            </a:pPr>
+          </a:p>
+          <a:p>
+            <a:pPr>
+              <a:spcBef>
+                <a:spcPts val="600"/>
+              </a:spcBef>
+              <a:spcAft>
+                <a:spcPts val="600"/>
+              </a:spcAft>
+              <a:defRPr sz="2000">
                 <a:solidFill>
-                  <a:srgbClr val="19375F"/>
+                  <a:srgbClr val="DCDCDC"/>
                 </a:solidFill>
                 <a:latin typeface="Consolas"/>
-              </a:rPr>
-              <a:t>   exercised</a:t>
-            </a:r>
-          </a:p>
-          <a:p>
-            <a:pPr/>
-          </a:p>
-          <a:p>
-            <a:pPr/>
-            <a:r>
-              <a:rPr sz="1800" b="0">
+              </a:defRPr>
+            </a:pPr>
+            <a:r>
+              <a:t>2. Marrow records which lines each test exercised</a:t>
+            </a:r>
+          </a:p>
+          <a:p>
+            <a:pPr>
+              <a:spcBef>
+                <a:spcPts val="600"/>
+              </a:spcBef>
+              <a:spcAft>
+                <a:spcPts val="600"/>
+              </a:spcAft>
+              <a:defRPr sz="2000">
                 <a:solidFill>
-                  <a:srgbClr val="19375F"/>
+                  <a:srgbClr val="DCDCDC"/>
                 </a:solidFill>
                 <a:latin typeface="Consolas"/>
-              </a:rPr>
-              <a:t>3. Emits interactive map + dead tests +</a:t>
-            </a:r>
-          </a:p>
-          <a:p>
-            <a:pPr/>
-            <a:r>
-              <a:rPr sz="1800" b="0">
+              </a:defRPr>
+            </a:pPr>
+          </a:p>
+          <a:p>
+            <a:pPr>
+              <a:spcBef>
+                <a:spcPts val="600"/>
+              </a:spcBef>
+              <a:spcAft>
+                <a:spcPts val="600"/>
+              </a:spcAft>
+              <a:defRPr sz="2000">
                 <a:solidFill>
-                  <a:srgbClr val="19375F"/>
+                  <a:srgbClr val="DCDCDC"/>
                 </a:solidFill>
                 <a:latin typeface="Consolas"/>
-              </a:rPr>
-              <a:t>   untested lines</a:t>
+              </a:defRPr>
+            </a:pPr>
+            <a:r>
+              <a:t>3. Emits interactive map + list of dead tests and untested lines</a:t>
             </a:r>
           </a:p>
         </p:txBody>
@@ -3625,7 +3764,7 @@
     <p:bg>
       <p:bgPr>
         <a:solidFill>
-          <a:srgbClr val="19375F"/>
+          <a:srgbClr val="14141E"/>
         </a:solidFill>
         <a:effectLst/>
       </p:bgPr>
@@ -3645,7 +3784,43 @@
         </p:nvSpPr>
         <p:spPr>
           <a:xfrm>
-            <a:off x="457200" y="1371600"/>
+            <a:off x="457200" y="2286000"/>
+            <a:ext cx="8229600" cy="1371600"/>
+          </a:xfrm>
+          <a:prstGeom prst="rect">
+            <a:avLst/>
+          </a:prstGeom>
+          <a:noFill/>
+        </p:spPr>
+        <p:txBody>
+          <a:bodyPr wrap="square">
+            <a:spAutoFit/>
+          </a:bodyPr>
+          <a:lstStyle/>
+          <a:p>
+            <a:pPr algn="ctr">
+              <a:defRPr sz="4800" b="1">
+                <a:solidFill>
+                  <a:srgbClr val="4287F5"/>
+                </a:solidFill>
+                <a:latin typeface="Consolas"/>
+              </a:defRPr>
+            </a:pPr>
+            <a:r>
+              <a:t>Install Marrow</a:t>
+            </a:r>
+          </a:p>
+        </p:txBody>
+      </p:sp>
+      <p:sp>
+        <p:nvSpPr>
+          <p:cNvPr id="3" name="TextBox 2"/>
+          <p:cNvSpPr txBox="1"/>
+          <p:nvPr/>
+        </p:nvSpPr>
+        <p:spPr>
+          <a:xfrm>
+            <a:off x="457200" y="3840480"/>
             <a:ext cx="8229600" cy="914400"/>
           </a:xfrm>
           <a:prstGeom prst="rect">
@@ -3654,34 +3829,35 @@
           <a:noFill/>
         </p:spPr>
         <p:txBody>
-          <a:bodyPr wrap="none">
+          <a:bodyPr wrap="square">
             <a:spAutoFit/>
           </a:bodyPr>
           <a:lstStyle/>
           <a:p>
-            <a:pPr algn="ctr"/>
-            <a:r>
-              <a:rPr sz="4800" b="1">
+            <a:pPr algn="ctr">
+              <a:defRPr sz="3200">
                 <a:solidFill>
-                  <a:srgbClr val="FFFFFF"/>
+                  <a:srgbClr val="4287F5"/>
                 </a:solidFill>
                 <a:latin typeface="Consolas"/>
-              </a:rPr>
-              <a:t>Install Marrow</a:t>
-            </a:r>
-          </a:p>
-        </p:txBody>
-      </p:sp>
-      <p:sp>
-        <p:nvSpPr>
-          <p:cNvPr id="3" name="TextBox 2"/>
+              </a:defRPr>
+            </a:pPr>
+            <a:r>
+              <a:t>pipx install marrow</a:t>
+            </a:r>
+          </a:p>
+        </p:txBody>
+      </p:sp>
+      <p:sp>
+        <p:nvSpPr>
+          <p:cNvPr id="4" name="TextBox 3"/>
           <p:cNvSpPr txBox="1"/>
           <p:nvPr/>
         </p:nvSpPr>
         <p:spPr>
           <a:xfrm>
-            <a:off x="457200" y="2743200"/>
-            <a:ext cx="8229600" cy="914400"/>
+            <a:off x="457200" y="5303520"/>
+            <a:ext cx="8229600" cy="1828800"/>
           </a:xfrm>
           <a:prstGeom prst="rect">
             <a:avLst/>
@@ -3689,54 +3865,20 @@
           <a:noFill/>
         </p:spPr>
         <p:txBody>
-          <a:bodyPr wrap="none">
+          <a:bodyPr wrap="square">
             <a:spAutoFit/>
           </a:bodyPr>
           <a:lstStyle/>
           <a:p>
-            <a:pPr algn="ctr"/>
-            <a:r>
-              <a:rPr sz="3200" b="0">
+            <a:pPr algn="ctr">
+              <a:defRPr sz="2400">
                 <a:solidFill>
-                  <a:srgbClr val="4287F5"/>
+                  <a:srgbClr val="DCDCDC"/>
                 </a:solidFill>
                 <a:latin typeface="Consolas"/>
-              </a:rPr>
-              <a:t>pipx install marrow</a:t>
-            </a:r>
-          </a:p>
-        </p:txBody>
-      </p:sp>
-      <p:sp>
-        <p:nvSpPr>
-          <p:cNvPr id="4" name="TextBox 3"/>
-          <p:cNvSpPr txBox="1"/>
-          <p:nvPr/>
-        </p:nvSpPr>
-        <p:spPr>
-          <a:xfrm>
-            <a:off x="457200" y="4114800"/>
-            <a:ext cx="8229600" cy="1371600"/>
-          </a:xfrm>
-          <a:prstGeom prst="rect">
-            <a:avLst/>
-          </a:prstGeom>
-          <a:noFill/>
-        </p:spPr>
-        <p:txBody>
-          <a:bodyPr wrap="none">
-            <a:spAutoFit/>
-          </a:bodyPr>
-          <a:lstStyle/>
-          <a:p>
-            <a:pPr algn="ctr"/>
-            <a:r>
-              <a:rPr sz="2400" b="0">
-                <a:solidFill>
-                  <a:srgbClr val="FFFFFF"/>
-                </a:solidFill>
-                <a:latin typeface="Consolas"/>
-              </a:rPr>
+              </a:defRPr>
+            </a:pPr>
+            <a:r>
               <a:t>Works with pytest, Jest, go test.</a:t>
             </a:r>
           </a:p>

--- a/harness/out/pptx/pitch_deck/warm/deck.pptx
+++ b/harness/out/pptx/pitch_deck/warm/deck.pptx
@@ -3088,7 +3088,7 @@
     <p:bg>
       <p:bgPr>
         <a:solidFill>
-          <a:srgbClr val="14141E"/>
+          <a:srgbClr val="F7F6F3"/>
         </a:solidFill>
         <a:effectLst/>
       </p:bgPr>
@@ -3108,8 +3108,8 @@
         </p:nvSpPr>
         <p:spPr>
           <a:xfrm>
-            <a:off x="457200" y="3200400"/>
-            <a:ext cx="8229600" cy="1371600"/>
+            <a:off x="822960" y="3200400"/>
+            <a:ext cx="7498080" cy="1463040"/>
           </a:xfrm>
           <a:prstGeom prst="rect">
             <a:avLst/>
@@ -3117,20 +3117,26 @@
           <a:noFill/>
         </p:spPr>
         <p:txBody>
-          <a:bodyPr wrap="square">
+          <a:bodyPr wrap="square" lIns="0" rIns="0" tIns="0" bIns="0">
             <a:spAutoFit/>
           </a:bodyPr>
           <a:lstStyle/>
           <a:p>
             <a:pPr algn="ctr">
-              <a:defRPr sz="5400" b="1">
+              <a:lnSpc>
+                <a:spcPct val="115000"/>
+              </a:lnSpc>
+              <a:spcAft>
+                <a:spcPts val="0"/>
+              </a:spcAft>
+            </a:pPr>
+            <a:r>
+              <a:rPr sz="7600" b="1">
                 <a:solidFill>
-                  <a:srgbClr val="4287F5"/>
+                  <a:srgbClr val="1E1E1E"/>
                 </a:solidFill>
                 <a:latin typeface="Consolas"/>
-              </a:defRPr>
-            </a:pPr>
-            <a:r>
+              </a:rPr>
               <a:t>Marrow</a:t>
             </a:r>
           </a:p>
@@ -3138,121 +3144,25 @@
       </p:sp>
       <p:sp>
         <p:nvSpPr>
-          <p:cNvPr id="3" name="TextBox 2"/>
-          <p:cNvSpPr txBox="1"/>
+          <p:cNvPr id="3" name="Rectangle 2"/>
+          <p:cNvSpPr/>
           <p:nvPr/>
         </p:nvSpPr>
         <p:spPr>
           <a:xfrm>
-            <a:off x="457200" y="4754880"/>
-            <a:ext cx="8229600" cy="1828800"/>
+            <a:off x="3840480" y="4892040"/>
+            <a:ext cx="1463040" cy="50800"/>
           </a:xfrm>
           <a:prstGeom prst="rect">
             <a:avLst/>
           </a:prstGeom>
-          <a:noFill/>
-        </p:spPr>
-        <p:txBody>
-          <a:bodyPr wrap="square">
-            <a:spAutoFit/>
-          </a:bodyPr>
-          <a:lstStyle/>
-          <a:p>
-            <a:pPr algn="ctr">
-              <a:defRPr sz="2800">
-                <a:solidFill>
-                  <a:srgbClr val="DCDCDC"/>
-                </a:solidFill>
-                <a:latin typeface="Consolas"/>
-              </a:defRPr>
-            </a:pPr>
-            <a:r>
-              <a:t>Know what your tests actually cover.</a:t>
-            </a:r>
-          </a:p>
-        </p:txBody>
-      </p:sp>
-    </p:spTree>
-  </p:cSld>
-  <p:clrMapOvr>
-    <a:masterClrMapping/>
-  </p:clrMapOvr>
-</p:sld>
-</file>
-
-<file path=ppt/slides/slide2.xml><?xml version="1.0" encoding="utf-8"?>
-<p:sld xmlns:a="http://schemas.openxmlformats.org/drawingml/2006/main" xmlns:p="http://schemas.openxmlformats.org/presentationml/2006/main" xmlns:r="http://schemas.openxmlformats.org/officeDocument/2006/relationships">
-  <p:cSld>
-    <p:bg>
-      <p:bgPr>
-        <a:solidFill>
-          <a:srgbClr val="14141E"/>
-        </a:solidFill>
-        <a:effectLst/>
-      </p:bgPr>
-    </p:bg>
-    <p:spTree>
-      <p:nvGrpSpPr>
-        <p:cNvPr id="1" name=""/>
-        <p:cNvGrpSpPr/>
-        <p:nvPr/>
-      </p:nvGrpSpPr>
-      <p:grpSpPr/>
-      <p:sp>
-        <p:nvSpPr>
-          <p:cNvPr id="2" name="TextBox 1"/>
-          <p:cNvSpPr txBox="1"/>
-          <p:nvPr/>
-        </p:nvSpPr>
-        <p:spPr>
-          <a:xfrm>
-            <a:off x="457200" y="731520"/>
-            <a:ext cx="8229600" cy="914400"/>
-          </a:xfrm>
-          <a:prstGeom prst="rect">
-            <a:avLst/>
-          </a:prstGeom>
-          <a:noFill/>
-        </p:spPr>
-        <p:txBody>
-          <a:bodyPr wrap="square">
-            <a:spAutoFit/>
-          </a:bodyPr>
-          <a:lstStyle/>
-          <a:p>
-            <a:pPr>
-              <a:defRPr sz="4000" b="1">
-                <a:solidFill>
-                  <a:srgbClr val="4287F5"/>
-                </a:solidFill>
-                <a:latin typeface="Consolas"/>
-              </a:defRPr>
-            </a:pPr>
-            <a:r>
-              <a:t>The Problem</a:t>
-            </a:r>
-          </a:p>
-        </p:txBody>
-      </p:sp>
-      <p:sp>
-        <p:nvSpPr>
-          <p:cNvPr id="3" name="Rectangle 2"/>
-          <p:cNvSpPr/>
-          <p:nvPr/>
-        </p:nvSpPr>
-        <p:spPr>
-          <a:xfrm>
-            <a:off x="457200" y="1828800"/>
-            <a:ext cx="1828800" cy="0"/>
-          </a:xfrm>
-          <a:prstGeom prst="rect">
-            <a:avLst/>
-          </a:prstGeom>
-          <a:ln w="25400">
-            <a:solidFill>
-              <a:srgbClr val="4287F5"/>
-            </a:solidFill>
+          <a:solidFill>
+            <a:srgbClr val="C2410C"/>
+          </a:solidFill>
+          <a:ln>
+            <a:noFill/>
           </a:ln>
+          <a:effectLst/>
         </p:spPr>
         <p:style>
           <a:lnRef idx="1">
@@ -3284,8 +3194,8 @@
         </p:nvSpPr>
         <p:spPr>
           <a:xfrm>
-            <a:off x="731520" y="2286000"/>
-            <a:ext cx="7680960" cy="5943600"/>
+            <a:off x="822960" y="5440680"/>
+            <a:ext cx="7498080" cy="914400"/>
           </a:xfrm>
           <a:prstGeom prst="rect">
             <a:avLst/>
@@ -3293,62 +3203,27 @@
           <a:noFill/>
         </p:spPr>
         <p:txBody>
-          <a:bodyPr wrap="square">
+          <a:bodyPr wrap="square" lIns="0" rIns="0" tIns="0" bIns="0">
             <a:spAutoFit/>
           </a:bodyPr>
           <a:lstStyle/>
           <a:p>
-            <a:pPr>
-              <a:spcBef>
-                <a:spcPts val="600"/>
-              </a:spcBef>
+            <a:pPr algn="ctr">
+              <a:lnSpc>
+                <a:spcPct val="115000"/>
+              </a:lnSpc>
               <a:spcAft>
-                <a:spcPts val="600"/>
+                <a:spcPts val="0"/>
               </a:spcAft>
-              <a:defRPr sz="2000">
+            </a:pPr>
+            <a:r>
+              <a:rPr sz="2000" b="0">
                 <a:solidFill>
-                  <a:srgbClr val="DCDCDC"/>
+                  <a:srgbClr val="6B6762"/>
                 </a:solidFill>
                 <a:latin typeface="Consolas"/>
-              </a:defRPr>
-            </a:pPr>
-            <a:r>
-              <a:t>Big test suites hide their gaps.</a:t>
-            </a:r>
-          </a:p>
-          <a:p>
-            <a:pPr>
-              <a:spcBef>
-                <a:spcPts val="600"/>
-              </a:spcBef>
-              <a:spcAft>
-                <a:spcPts val="600"/>
-              </a:spcAft>
-              <a:defRPr sz="2000">
-                <a:solidFill>
-                  <a:srgbClr val="DCDCDC"/>
-                </a:solidFill>
-                <a:latin typeface="Consolas"/>
-              </a:defRPr>
-            </a:pPr>
-          </a:p>
-          <a:p>
-            <a:pPr>
-              <a:spcBef>
-                <a:spcPts val="600"/>
-              </a:spcBef>
-              <a:spcAft>
-                <a:spcPts val="600"/>
-              </a:spcAft>
-              <a:defRPr sz="2000">
-                <a:solidFill>
-                  <a:srgbClr val="DCDCDC"/>
-                </a:solidFill>
-                <a:latin typeface="Consolas"/>
-              </a:defRPr>
-            </a:pPr>
-            <a:r>
-              <a:t>Large suites are slow and nobody knows which tests cover which code, so dead tests linger and real gaps go unnoticed.</a:t>
+              </a:rPr>
+              <a:t>Know what your tests actually cover.</a:t>
             </a:r>
           </a:p>
         </p:txBody>
@@ -3361,13 +3236,13 @@
 </p:sld>
 </file>
 
-<file path=ppt/slides/slide3.xml><?xml version="1.0" encoding="utf-8"?>
+<file path=ppt/slides/slide2.xml><?xml version="1.0" encoding="utf-8"?>
 <p:sld xmlns:a="http://schemas.openxmlformats.org/drawingml/2006/main" xmlns:p="http://schemas.openxmlformats.org/presentationml/2006/main" xmlns:r="http://schemas.openxmlformats.org/officeDocument/2006/relationships">
   <p:cSld>
     <p:bg>
       <p:bgPr>
         <a:solidFill>
-          <a:srgbClr val="14141E"/>
+          <a:srgbClr val="F7F6F3"/>
         </a:solidFill>
         <a:effectLst/>
       </p:bgPr>
@@ -3387,8 +3262,8 @@
         </p:nvSpPr>
         <p:spPr>
           <a:xfrm>
-            <a:off x="457200" y="731520"/>
-            <a:ext cx="8229600" cy="914400"/>
+            <a:off x="822960" y="1005840"/>
+            <a:ext cx="7498080" cy="365760"/>
           </a:xfrm>
           <a:prstGeom prst="rect">
             <a:avLst/>
@@ -3396,44 +3271,94 @@
           <a:noFill/>
         </p:spPr>
         <p:txBody>
-          <a:bodyPr wrap="square">
+          <a:bodyPr wrap="square" lIns="0" rIns="0" tIns="0" bIns="0">
             <a:spAutoFit/>
           </a:bodyPr>
           <a:lstStyle/>
           <a:p>
-            <a:pPr>
-              <a:defRPr sz="4000" b="1">
+            <a:pPr algn="ctr">
+              <a:lnSpc>
+                <a:spcPct val="115000"/>
+              </a:lnSpc>
+              <a:spcAft>
+                <a:spcPts val="0"/>
+              </a:spcAft>
+            </a:pPr>
+            <a:r>
+              <a:rPr sz="1500" b="0">
                 <a:solidFill>
-                  <a:srgbClr val="4287F5"/>
+                  <a:srgbClr val="C2410C"/>
                 </a:solidFill>
                 <a:latin typeface="Consolas"/>
-              </a:defRPr>
-            </a:pPr>
-            <a:r>
-              <a:t>The Idea</a:t>
-            </a:r>
-          </a:p>
-        </p:txBody>
-      </p:sp>
-      <p:sp>
-        <p:nvSpPr>
-          <p:cNvPr id="3" name="Rectangle 2"/>
-          <p:cNvSpPr/>
+              </a:rPr>
+              <a:t>THE PROBLEM</a:t>
+            </a:r>
+          </a:p>
+        </p:txBody>
+      </p:sp>
+      <p:sp>
+        <p:nvSpPr>
+          <p:cNvPr id="3" name="TextBox 2"/>
+          <p:cNvSpPr txBox="1"/>
           <p:nvPr/>
         </p:nvSpPr>
         <p:spPr>
           <a:xfrm>
-            <a:off x="457200" y="1828800"/>
-            <a:ext cx="1828800" cy="0"/>
+            <a:off x="822960" y="1508760"/>
+            <a:ext cx="7498080" cy="1828800"/>
           </a:xfrm>
           <a:prstGeom prst="rect">
             <a:avLst/>
           </a:prstGeom>
-          <a:ln w="25400">
-            <a:solidFill>
-              <a:srgbClr val="4287F5"/>
-            </a:solidFill>
+          <a:noFill/>
+        </p:spPr>
+        <p:txBody>
+          <a:bodyPr wrap="square" lIns="0" rIns="0" tIns="0" bIns="0">
+            <a:spAutoFit/>
+          </a:bodyPr>
+          <a:lstStyle/>
+          <a:p>
+            <a:pPr algn="ctr">
+              <a:lnSpc>
+                <a:spcPct val="110000"/>
+              </a:lnSpc>
+              <a:spcAft>
+                <a:spcPts val="0"/>
+              </a:spcAft>
+            </a:pPr>
+            <a:r>
+              <a:rPr sz="3800" b="1">
+                <a:solidFill>
+                  <a:srgbClr val="1E1E1E"/>
+                </a:solidFill>
+                <a:latin typeface="Consolas"/>
+              </a:rPr>
+              <a:t>Big test suites hide their gaps.</a:t>
+            </a:r>
+          </a:p>
+        </p:txBody>
+      </p:sp>
+      <p:sp>
+        <p:nvSpPr>
+          <p:cNvPr id="4" name="Rectangle 3"/>
+          <p:cNvSpPr/>
+          <p:nvPr/>
+        </p:nvSpPr>
+        <p:spPr>
+          <a:xfrm>
+            <a:off x="4023360" y="3200400"/>
+            <a:ext cx="1097280" cy="50800"/>
+          </a:xfrm>
+          <a:prstGeom prst="rect">
+            <a:avLst/>
+          </a:prstGeom>
+          <a:solidFill>
+            <a:srgbClr val="C2410C"/>
+          </a:solidFill>
+          <a:ln>
+            <a:noFill/>
           </a:ln>
+          <a:effectLst/>
         </p:spPr>
         <p:style>
           <a:lnRef idx="1">
@@ -3459,14 +3384,14 @@
       </p:sp>
       <p:sp>
         <p:nvSpPr>
-          <p:cNvPr id="4" name="TextBox 3"/>
+          <p:cNvPr id="5" name="TextBox 4"/>
           <p:cNvSpPr txBox="1"/>
           <p:nvPr/>
         </p:nvSpPr>
         <p:spPr>
           <a:xfrm>
-            <a:off x="731520" y="2286000"/>
-            <a:ext cx="7680960" cy="5943600"/>
+            <a:off x="1280160" y="3931920"/>
+            <a:ext cx="6583680" cy="2743200"/>
           </a:xfrm>
           <a:prstGeom prst="rect">
             <a:avLst/>
@@ -3474,62 +3399,49 @@
           <a:noFill/>
         </p:spPr>
         <p:txBody>
-          <a:bodyPr wrap="square">
+          <a:bodyPr wrap="square" lIns="0" rIns="0" tIns="0" bIns="0">
             <a:spAutoFit/>
           </a:bodyPr>
           <a:lstStyle/>
           <a:p>
-            <a:pPr>
+            <a:pPr algn="ctr">
+              <a:lnSpc>
+                <a:spcPct val="140000"/>
+              </a:lnSpc>
+              <a:spcAft>
+                <a:spcPts val="0"/>
+              </a:spcAft>
+            </a:pPr>
+            <a:r>
+              <a:rPr sz="2000" b="0">
+                <a:solidFill>
+                  <a:srgbClr val="1E1E1E"/>
+                </a:solidFill>
+                <a:latin typeface="Consolas"/>
+              </a:rPr>
+              <a:t>Large suites are slow, and nobody knows which tests cover which code.</a:t>
+            </a:r>
+          </a:p>
+          <a:p>
+            <a:pPr algn="ctr">
+              <a:lnSpc>
+                <a:spcPct val="140000"/>
+              </a:lnSpc>
               <a:spcBef>
-                <a:spcPts val="600"/>
+                <a:spcPts val="2600"/>
               </a:spcBef>
               <a:spcAft>
-                <a:spcPts val="600"/>
+                <a:spcPts val="0"/>
               </a:spcAft>
-              <a:defRPr sz="2000">
+            </a:pPr>
+            <a:r>
+              <a:rPr sz="2000" b="0">
                 <a:solidFill>
-                  <a:srgbClr val="DCDCDC"/>
+                  <a:srgbClr val="6B6762"/>
                 </a:solidFill>
                 <a:latin typeface="Consolas"/>
-              </a:defRPr>
-            </a:pPr>
-            <a:r>
-              <a:t>Watch one run. Draw the real map.</a:t>
-            </a:r>
-          </a:p>
-          <a:p>
-            <a:pPr>
-              <a:spcBef>
-                <a:spcPts val="600"/>
-              </a:spcBef>
-              <a:spcAft>
-                <a:spcPts val="600"/>
-              </a:spcAft>
-              <a:defRPr sz="2000">
-                <a:solidFill>
-                  <a:srgbClr val="DCDCDC"/>
-                </a:solidFill>
-                <a:latin typeface="Consolas"/>
-              </a:defRPr>
-            </a:pPr>
-          </a:p>
-          <a:p>
-            <a:pPr>
-              <a:spcBef>
-                <a:spcPts val="600"/>
-              </a:spcBef>
-              <a:spcAft>
-                <a:spcPts val="600"/>
-              </a:spcAft>
-              <a:defRPr sz="2000">
-                <a:solidFill>
-                  <a:srgbClr val="DCDCDC"/>
-                </a:solidFill>
-                <a:latin typeface="Consolas"/>
-              </a:defRPr>
-            </a:pPr>
-            <a:r>
-              <a:t>Marrow instruments a single test run and produces a test→code coverage map — no annotations, no config.</a:t>
+              </a:rPr>
+              <a:t>So dead tests linger — and real gaps go unnoticed.</a:t>
             </a:r>
           </a:p>
         </p:txBody>
@@ -3542,13 +3454,13 @@
 </p:sld>
 </file>
 
-<file path=ppt/slides/slide4.xml><?xml version="1.0" encoding="utf-8"?>
+<file path=ppt/slides/slide3.xml><?xml version="1.0" encoding="utf-8"?>
 <p:sld xmlns:a="http://schemas.openxmlformats.org/drawingml/2006/main" xmlns:p="http://schemas.openxmlformats.org/presentationml/2006/main" xmlns:r="http://schemas.openxmlformats.org/officeDocument/2006/relationships">
   <p:cSld>
     <p:bg>
       <p:bgPr>
         <a:solidFill>
-          <a:srgbClr val="14141E"/>
+          <a:srgbClr val="F7F6F3"/>
         </a:solidFill>
         <a:effectLst/>
       </p:bgPr>
@@ -3568,8 +3480,8 @@
         </p:nvSpPr>
         <p:spPr>
           <a:xfrm>
-            <a:off x="457200" y="731520"/>
-            <a:ext cx="8229600" cy="914400"/>
+            <a:off x="822960" y="1005840"/>
+            <a:ext cx="7498080" cy="365760"/>
           </a:xfrm>
           <a:prstGeom prst="rect">
             <a:avLst/>
@@ -3577,44 +3489,95 @@
           <a:noFill/>
         </p:spPr>
         <p:txBody>
-          <a:bodyPr wrap="square">
+          <a:bodyPr wrap="square" lIns="0" rIns="0" tIns="0" bIns="0">
             <a:spAutoFit/>
           </a:bodyPr>
           <a:lstStyle/>
           <a:p>
-            <a:pPr>
-              <a:defRPr sz="4000" b="1">
+            <a:pPr algn="ctr">
+              <a:lnSpc>
+                <a:spcPct val="115000"/>
+              </a:lnSpc>
+              <a:spcAft>
+                <a:spcPts val="0"/>
+              </a:spcAft>
+            </a:pPr>
+            <a:r>
+              <a:rPr sz="1500" b="0">
                 <a:solidFill>
-                  <a:srgbClr val="4287F5"/>
+                  <a:srgbClr val="C2410C"/>
                 </a:solidFill>
                 <a:latin typeface="Consolas"/>
-              </a:defRPr>
-            </a:pPr>
-            <a:r>
-              <a:t>How It Works</a:t>
-            </a:r>
-          </a:p>
-        </p:txBody>
-      </p:sp>
-      <p:sp>
-        <p:nvSpPr>
-          <p:cNvPr id="3" name="Rectangle 2"/>
-          <p:cNvSpPr/>
+              </a:rPr>
+              <a:t>THE IDEA</a:t>
+            </a:r>
+          </a:p>
+        </p:txBody>
+      </p:sp>
+      <p:sp>
+        <p:nvSpPr>
+          <p:cNvPr id="3" name="TextBox 2"/>
+          <p:cNvSpPr txBox="1"/>
           <p:nvPr/>
         </p:nvSpPr>
         <p:spPr>
           <a:xfrm>
-            <a:off x="457200" y="1828800"/>
-            <a:ext cx="1828800" cy="0"/>
+            <a:off x="822960" y="1508760"/>
+            <a:ext cx="7498080" cy="1828800"/>
           </a:xfrm>
           <a:prstGeom prst="rect">
             <a:avLst/>
           </a:prstGeom>
-          <a:ln w="25400">
-            <a:solidFill>
-              <a:srgbClr val="4287F5"/>
-            </a:solidFill>
+          <a:noFill/>
+        </p:spPr>
+        <p:txBody>
+          <a:bodyPr wrap="square" lIns="0" rIns="0" tIns="0" bIns="0">
+            <a:spAutoFit/>
+          </a:bodyPr>
+          <a:lstStyle/>
+          <a:p>
+            <a:pPr algn="ctr">
+              <a:lnSpc>
+                <a:spcPct val="110000"/>
+              </a:lnSpc>
+              <a:spcAft>
+                <a:spcPts val="0"/>
+              </a:spcAft>
+            </a:pPr>
+            <a:r>
+              <a:rPr sz="3800" b="1">
+                <a:solidFill>
+                  <a:srgbClr val="1E1E1E"/>
+                </a:solidFill>
+                <a:latin typeface="Consolas"/>
+              </a:rPr>
+              <a:t>Watch one run.
+Draw the real map.</a:t>
+            </a:r>
+          </a:p>
+        </p:txBody>
+      </p:sp>
+      <p:sp>
+        <p:nvSpPr>
+          <p:cNvPr id="4" name="Rectangle 3"/>
+          <p:cNvSpPr/>
+          <p:nvPr/>
+        </p:nvSpPr>
+        <p:spPr>
+          <a:xfrm>
+            <a:off x="4023360" y="3840480"/>
+            <a:ext cx="1097280" cy="50800"/>
+          </a:xfrm>
+          <a:prstGeom prst="rect">
+            <a:avLst/>
+          </a:prstGeom>
+          <a:solidFill>
+            <a:srgbClr val="C2410C"/>
+          </a:solidFill>
+          <a:ln>
+            <a:noFill/>
           </a:ln>
+          <a:effectLst/>
         </p:spPr>
         <p:style>
           <a:lnRef idx="1">
@@ -3640,14 +3603,14 @@
       </p:sp>
       <p:sp>
         <p:nvSpPr>
-          <p:cNvPr id="4" name="TextBox 3"/>
+          <p:cNvPr id="5" name="TextBox 4"/>
           <p:cNvSpPr txBox="1"/>
           <p:nvPr/>
         </p:nvSpPr>
         <p:spPr>
           <a:xfrm>
-            <a:off x="731520" y="2286000"/>
-            <a:ext cx="7680960" cy="5943600"/>
+            <a:off x="1280160" y="4572000"/>
+            <a:ext cx="6583680" cy="2194560"/>
           </a:xfrm>
           <a:prstGeom prst="rect">
             <a:avLst/>
@@ -3655,97 +3618,542 @@
           <a:noFill/>
         </p:spPr>
         <p:txBody>
-          <a:bodyPr wrap="square">
+          <a:bodyPr wrap="square" lIns="0" rIns="0" tIns="0" bIns="0">
             <a:spAutoFit/>
           </a:bodyPr>
           <a:lstStyle/>
           <a:p>
-            <a:pPr>
+            <a:pPr algn="ctr">
+              <a:lnSpc>
+                <a:spcPct val="140000"/>
+              </a:lnSpc>
+              <a:spcAft>
+                <a:spcPts val="0"/>
+              </a:spcAft>
+            </a:pPr>
+            <a:r>
+              <a:rPr sz="2000" b="0">
+                <a:solidFill>
+                  <a:srgbClr val="1E1E1E"/>
+                </a:solidFill>
+                <a:latin typeface="Consolas"/>
+              </a:rPr>
+              <a:t>Marrow instruments a single test run and produces a test→code coverage map.</a:t>
+            </a:r>
+          </a:p>
+        </p:txBody>
+      </p:sp>
+      <p:sp>
+        <p:nvSpPr>
+          <p:cNvPr id="6" name="TextBox 5"/>
+          <p:cNvSpPr txBox="1"/>
+          <p:nvPr/>
+        </p:nvSpPr>
+        <p:spPr>
+          <a:xfrm>
+            <a:off x="822960" y="6309360"/>
+            <a:ext cx="7498080" cy="548640"/>
+          </a:xfrm>
+          <a:prstGeom prst="rect">
+            <a:avLst/>
+          </a:prstGeom>
+          <a:noFill/>
+        </p:spPr>
+        <p:txBody>
+          <a:bodyPr wrap="square" lIns="0" rIns="0" tIns="0" bIns="0">
+            <a:spAutoFit/>
+          </a:bodyPr>
+          <a:lstStyle/>
+          <a:p>
+            <a:pPr algn="ctr">
+              <a:lnSpc>
+                <a:spcPct val="115000"/>
+              </a:lnSpc>
+              <a:spcAft>
+                <a:spcPts val="0"/>
+              </a:spcAft>
+            </a:pPr>
+            <a:r>
+              <a:rPr sz="2000" b="1">
+                <a:solidFill>
+                  <a:srgbClr val="C2410C"/>
+                </a:solidFill>
+                <a:latin typeface="Consolas"/>
+              </a:rPr>
+              <a:t>No annotations. No config.</a:t>
+            </a:r>
+          </a:p>
+        </p:txBody>
+      </p:sp>
+    </p:spTree>
+  </p:cSld>
+  <p:clrMapOvr>
+    <a:masterClrMapping/>
+  </p:clrMapOvr>
+</p:sld>
+</file>
+
+<file path=ppt/slides/slide4.xml><?xml version="1.0" encoding="utf-8"?>
+<p:sld xmlns:a="http://schemas.openxmlformats.org/drawingml/2006/main" xmlns:p="http://schemas.openxmlformats.org/presentationml/2006/main" xmlns:r="http://schemas.openxmlformats.org/officeDocument/2006/relationships">
+  <p:cSld>
+    <p:bg>
+      <p:bgPr>
+        <a:solidFill>
+          <a:srgbClr val="F7F6F3"/>
+        </a:solidFill>
+        <a:effectLst/>
+      </p:bgPr>
+    </p:bg>
+    <p:spTree>
+      <p:nvGrpSpPr>
+        <p:cNvPr id="1" name=""/>
+        <p:cNvGrpSpPr/>
+        <p:nvPr/>
+      </p:nvGrpSpPr>
+      <p:grpSpPr/>
+      <p:sp>
+        <p:nvSpPr>
+          <p:cNvPr id="2" name="TextBox 1"/>
+          <p:cNvSpPr txBox="1"/>
+          <p:nvPr/>
+        </p:nvSpPr>
+        <p:spPr>
+          <a:xfrm>
+            <a:off x="822960" y="1005840"/>
+            <a:ext cx="7498080" cy="365760"/>
+          </a:xfrm>
+          <a:prstGeom prst="rect">
+            <a:avLst/>
+          </a:prstGeom>
+          <a:noFill/>
+        </p:spPr>
+        <p:txBody>
+          <a:bodyPr wrap="square" lIns="0" rIns="0" tIns="0" bIns="0">
+            <a:spAutoFit/>
+          </a:bodyPr>
+          <a:lstStyle/>
+          <a:p>
+            <a:pPr algn="ctr">
+              <a:lnSpc>
+                <a:spcPct val="115000"/>
+              </a:lnSpc>
+              <a:spcAft>
+                <a:spcPts val="0"/>
+              </a:spcAft>
+            </a:pPr>
+            <a:r>
+              <a:rPr sz="1500" b="0">
+                <a:solidFill>
+                  <a:srgbClr val="C2410C"/>
+                </a:solidFill>
+                <a:latin typeface="Consolas"/>
+              </a:rPr>
+              <a:t>THREE STEPS</a:t>
+            </a:r>
+          </a:p>
+        </p:txBody>
+      </p:sp>
+      <p:sp>
+        <p:nvSpPr>
+          <p:cNvPr id="3" name="TextBox 2"/>
+          <p:cNvSpPr txBox="1"/>
+          <p:nvPr/>
+        </p:nvSpPr>
+        <p:spPr>
+          <a:xfrm>
+            <a:off x="822960" y="1508760"/>
+            <a:ext cx="7498080" cy="1828800"/>
+          </a:xfrm>
+          <a:prstGeom prst="rect">
+            <a:avLst/>
+          </a:prstGeom>
+          <a:noFill/>
+        </p:spPr>
+        <p:txBody>
+          <a:bodyPr wrap="square" lIns="0" rIns="0" tIns="0" bIns="0">
+            <a:spAutoFit/>
+          </a:bodyPr>
+          <a:lstStyle/>
+          <a:p>
+            <a:pPr algn="ctr">
+              <a:lnSpc>
+                <a:spcPct val="110000"/>
+              </a:lnSpc>
+              <a:spcAft>
+                <a:spcPts val="0"/>
+              </a:spcAft>
+            </a:pPr>
+            <a:r>
+              <a:rPr sz="3800" b="1">
+                <a:solidFill>
+                  <a:srgbClr val="1E1E1E"/>
+                </a:solidFill>
+                <a:latin typeface="Consolas"/>
+              </a:rPr>
+              <a:t>How it works</a:t>
+            </a:r>
+          </a:p>
+        </p:txBody>
+      </p:sp>
+      <p:sp>
+        <p:nvSpPr>
+          <p:cNvPr id="4" name="Rectangle 3"/>
+          <p:cNvSpPr/>
+          <p:nvPr/>
+        </p:nvSpPr>
+        <p:spPr>
+          <a:xfrm>
+            <a:off x="4023360" y="2926080"/>
+            <a:ext cx="1097280" cy="50800"/>
+          </a:xfrm>
+          <a:prstGeom prst="rect">
+            <a:avLst/>
+          </a:prstGeom>
+          <a:solidFill>
+            <a:srgbClr val="C2410C"/>
+          </a:solidFill>
+          <a:ln>
+            <a:noFill/>
+          </a:ln>
+          <a:effectLst/>
+        </p:spPr>
+        <p:style>
+          <a:lnRef idx="1">
+            <a:schemeClr val="accent1"/>
+          </a:lnRef>
+          <a:fillRef idx="3">
+            <a:schemeClr val="accent1"/>
+          </a:fillRef>
+          <a:effectRef idx="2">
+            <a:schemeClr val="accent1"/>
+          </a:effectRef>
+          <a:fontRef idx="minor">
+            <a:schemeClr val="lt1"/>
+          </a:fontRef>
+        </p:style>
+        <p:txBody>
+          <a:bodyPr rtlCol="0" anchor="ctr"/>
+          <a:lstStyle/>
+          <a:p>
+            <a:pPr algn="ctr"/>
+          </a:p>
+        </p:txBody>
+      </p:sp>
+      <p:sp>
+        <p:nvSpPr>
+          <p:cNvPr id="5" name="TextBox 4"/>
+          <p:cNvSpPr txBox="1"/>
+          <p:nvPr/>
+        </p:nvSpPr>
+        <p:spPr>
+          <a:xfrm>
+            <a:off x="1005840" y="3657600"/>
+            <a:ext cx="822960" cy="457200"/>
+          </a:xfrm>
+          <a:prstGeom prst="rect">
+            <a:avLst/>
+          </a:prstGeom>
+          <a:noFill/>
+        </p:spPr>
+        <p:txBody>
+          <a:bodyPr wrap="square" lIns="0" rIns="0" tIns="0" bIns="0">
+            <a:spAutoFit/>
+          </a:bodyPr>
+          <a:lstStyle/>
+          <a:p>
+            <a:pPr algn="l">
+              <a:lnSpc>
+                <a:spcPct val="115000"/>
+              </a:lnSpc>
+              <a:spcAft>
+                <a:spcPts val="0"/>
+              </a:spcAft>
+            </a:pPr>
+            <a:r>
+              <a:rPr sz="2000" b="1">
+                <a:solidFill>
+                  <a:srgbClr val="C2410C"/>
+                </a:solidFill>
+                <a:latin typeface="Consolas"/>
+              </a:rPr>
+              <a:t>01</a:t>
+            </a:r>
+          </a:p>
+        </p:txBody>
+      </p:sp>
+      <p:sp>
+        <p:nvSpPr>
+          <p:cNvPr id="6" name="TextBox 5"/>
+          <p:cNvSpPr txBox="1"/>
+          <p:nvPr/>
+        </p:nvSpPr>
+        <p:spPr>
+          <a:xfrm>
+            <a:off x="1920240" y="3657600"/>
+            <a:ext cx="6217920" cy="1371600"/>
+          </a:xfrm>
+          <a:prstGeom prst="rect">
+            <a:avLst/>
+          </a:prstGeom>
+          <a:noFill/>
+        </p:spPr>
+        <p:txBody>
+          <a:bodyPr wrap="square" lIns="0" rIns="0" tIns="0" bIns="0">
+            <a:spAutoFit/>
+          </a:bodyPr>
+          <a:lstStyle/>
+          <a:p>
+            <a:pPr algn="l">
+              <a:lnSpc>
+                <a:spcPct val="115000"/>
+              </a:lnSpc>
+              <a:spcAft>
+                <a:spcPts val="0"/>
+              </a:spcAft>
+            </a:pPr>
+            <a:r>
+              <a:rPr sz="2000" b="1">
+                <a:solidFill>
+                  <a:srgbClr val="1E1E1E"/>
+                </a:solidFill>
+                <a:latin typeface="Consolas"/>
+              </a:rPr>
+              <a:t>Run</a:t>
+            </a:r>
+          </a:p>
+          <a:p>
+            <a:pPr algn="l">
+              <a:lnSpc>
+                <a:spcPct val="135000"/>
+              </a:lnSpc>
               <a:spcBef>
                 <a:spcPts val="600"/>
               </a:spcBef>
               <a:spcAft>
-                <a:spcPts val="600"/>
+                <a:spcPts val="0"/>
               </a:spcAft>
-              <a:defRPr sz="2000">
+            </a:pPr>
+            <a:r>
+              <a:rPr sz="1500" b="0">
                 <a:solidFill>
-                  <a:srgbClr val="DCDCDC"/>
+                  <a:srgbClr val="6B6762"/>
                 </a:solidFill>
                 <a:latin typeface="Consolas"/>
-              </a:defRPr>
+              </a:rPr>
+              <a:t>marrow watch -- &lt;your test cmd&gt;</a:t>
+            </a:r>
+          </a:p>
+        </p:txBody>
+      </p:sp>
+      <p:sp>
+        <p:nvSpPr>
+          <p:cNvPr id="7" name="TextBox 6"/>
+          <p:cNvSpPr txBox="1"/>
+          <p:nvPr/>
+        </p:nvSpPr>
+        <p:spPr>
+          <a:xfrm>
+            <a:off x="1005840" y="5074920"/>
+            <a:ext cx="822960" cy="457200"/>
+          </a:xfrm>
+          <a:prstGeom prst="rect">
+            <a:avLst/>
+          </a:prstGeom>
+          <a:noFill/>
+        </p:spPr>
+        <p:txBody>
+          <a:bodyPr wrap="square" lIns="0" rIns="0" tIns="0" bIns="0">
+            <a:spAutoFit/>
+          </a:bodyPr>
+          <a:lstStyle/>
+          <a:p>
+            <a:pPr algn="l">
+              <a:lnSpc>
+                <a:spcPct val="115000"/>
+              </a:lnSpc>
+              <a:spcAft>
+                <a:spcPts val="0"/>
+              </a:spcAft>
             </a:pPr>
             <a:r>
-              <a:t>1. Run: marrow watch -- &lt;your test cmd&gt;</a:t>
-            </a:r>
-          </a:p>
-          <a:p>
-            <a:pPr>
+              <a:rPr sz="2000" b="1">
+                <a:solidFill>
+                  <a:srgbClr val="C2410C"/>
+                </a:solidFill>
+                <a:latin typeface="Consolas"/>
+              </a:rPr>
+              <a:t>02</a:t>
+            </a:r>
+          </a:p>
+        </p:txBody>
+      </p:sp>
+      <p:sp>
+        <p:nvSpPr>
+          <p:cNvPr id="8" name="TextBox 7"/>
+          <p:cNvSpPr txBox="1"/>
+          <p:nvPr/>
+        </p:nvSpPr>
+        <p:spPr>
+          <a:xfrm>
+            <a:off x="1920240" y="5074920"/>
+            <a:ext cx="6217920" cy="1371600"/>
+          </a:xfrm>
+          <a:prstGeom prst="rect">
+            <a:avLst/>
+          </a:prstGeom>
+          <a:noFill/>
+        </p:spPr>
+        <p:txBody>
+          <a:bodyPr wrap="square" lIns="0" rIns="0" tIns="0" bIns="0">
+            <a:spAutoFit/>
+          </a:bodyPr>
+          <a:lstStyle/>
+          <a:p>
+            <a:pPr algn="l">
+              <a:lnSpc>
+                <a:spcPct val="115000"/>
+              </a:lnSpc>
+              <a:spcAft>
+                <a:spcPts val="0"/>
+              </a:spcAft>
+            </a:pPr>
+            <a:r>
+              <a:rPr sz="2000" b="1">
+                <a:solidFill>
+                  <a:srgbClr val="1E1E1E"/>
+                </a:solidFill>
+                <a:latin typeface="Consolas"/>
+              </a:rPr>
+              <a:t>Record</a:t>
+            </a:r>
+          </a:p>
+          <a:p>
+            <a:pPr algn="l">
+              <a:lnSpc>
+                <a:spcPct val="135000"/>
+              </a:lnSpc>
               <a:spcBef>
                 <a:spcPts val="600"/>
               </a:spcBef>
               <a:spcAft>
-                <a:spcPts val="600"/>
+                <a:spcPts val="0"/>
               </a:spcAft>
-              <a:defRPr sz="2000">
+            </a:pPr>
+            <a:r>
+              <a:rPr sz="1500" b="0">
                 <a:solidFill>
-                  <a:srgbClr val="DCDCDC"/>
+                  <a:srgbClr val="6B6762"/>
                 </a:solidFill>
                 <a:latin typeface="Consolas"/>
-              </a:defRPr>
+              </a:rPr>
+              <a:t>Marrow records which lines each test exercised.</a:t>
+            </a:r>
+          </a:p>
+        </p:txBody>
+      </p:sp>
+      <p:sp>
+        <p:nvSpPr>
+          <p:cNvPr id="9" name="TextBox 8"/>
+          <p:cNvSpPr txBox="1"/>
+          <p:nvPr/>
+        </p:nvSpPr>
+        <p:spPr>
+          <a:xfrm>
+            <a:off x="1005840" y="6492240"/>
+            <a:ext cx="822960" cy="457200"/>
+          </a:xfrm>
+          <a:prstGeom prst="rect">
+            <a:avLst/>
+          </a:prstGeom>
+          <a:noFill/>
+        </p:spPr>
+        <p:txBody>
+          <a:bodyPr wrap="square" lIns="0" rIns="0" tIns="0" bIns="0">
+            <a:spAutoFit/>
+          </a:bodyPr>
+          <a:lstStyle/>
+          <a:p>
+            <a:pPr algn="l">
+              <a:lnSpc>
+                <a:spcPct val="115000"/>
+              </a:lnSpc>
+              <a:spcAft>
+                <a:spcPts val="0"/>
+              </a:spcAft>
             </a:pPr>
-          </a:p>
-          <a:p>
-            <a:pPr>
+            <a:r>
+              <a:rPr sz="2000" b="1">
+                <a:solidFill>
+                  <a:srgbClr val="C2410C"/>
+                </a:solidFill>
+                <a:latin typeface="Consolas"/>
+              </a:rPr>
+              <a:t>03</a:t>
+            </a:r>
+          </a:p>
+        </p:txBody>
+      </p:sp>
+      <p:sp>
+        <p:nvSpPr>
+          <p:cNvPr id="10" name="TextBox 9"/>
+          <p:cNvSpPr txBox="1"/>
+          <p:nvPr/>
+        </p:nvSpPr>
+        <p:spPr>
+          <a:xfrm>
+            <a:off x="1920240" y="6492240"/>
+            <a:ext cx="6217920" cy="1371600"/>
+          </a:xfrm>
+          <a:prstGeom prst="rect">
+            <a:avLst/>
+          </a:prstGeom>
+          <a:noFill/>
+        </p:spPr>
+        <p:txBody>
+          <a:bodyPr wrap="square" lIns="0" rIns="0" tIns="0" bIns="0">
+            <a:spAutoFit/>
+          </a:bodyPr>
+          <a:lstStyle/>
+          <a:p>
+            <a:pPr algn="l">
+              <a:lnSpc>
+                <a:spcPct val="115000"/>
+              </a:lnSpc>
+              <a:spcAft>
+                <a:spcPts val="0"/>
+              </a:spcAft>
+            </a:pPr>
+            <a:r>
+              <a:rPr sz="2000" b="1">
+                <a:solidFill>
+                  <a:srgbClr val="1E1E1E"/>
+                </a:solidFill>
+                <a:latin typeface="Consolas"/>
+              </a:rPr>
+              <a:t>Map</a:t>
+            </a:r>
+          </a:p>
+          <a:p>
+            <a:pPr algn="l">
+              <a:lnSpc>
+                <a:spcPct val="135000"/>
+              </a:lnSpc>
               <a:spcBef>
                 <a:spcPts val="600"/>
               </a:spcBef>
               <a:spcAft>
-                <a:spcPts val="600"/>
+                <a:spcPts val="0"/>
               </a:spcAft>
-              <a:defRPr sz="2000">
+            </a:pPr>
+            <a:r>
+              <a:rPr sz="1500" b="0">
                 <a:solidFill>
-                  <a:srgbClr val="DCDCDC"/>
+                  <a:srgbClr val="6B6762"/>
                 </a:solidFill>
                 <a:latin typeface="Consolas"/>
-              </a:defRPr>
-            </a:pPr>
-            <a:r>
-              <a:t>2. Marrow records which lines each test exercised</a:t>
-            </a:r>
-          </a:p>
-          <a:p>
-            <a:pPr>
-              <a:spcBef>
-                <a:spcPts val="600"/>
-              </a:spcBef>
-              <a:spcAft>
-                <a:spcPts val="600"/>
-              </a:spcAft>
-              <a:defRPr sz="2000">
-                <a:solidFill>
-                  <a:srgbClr val="DCDCDC"/>
-                </a:solidFill>
-                <a:latin typeface="Consolas"/>
-              </a:defRPr>
-            </a:pPr>
-          </a:p>
-          <a:p>
-            <a:pPr>
-              <a:spcBef>
-                <a:spcPts val="600"/>
-              </a:spcBef>
-              <a:spcAft>
-                <a:spcPts val="600"/>
-              </a:spcAft>
-              <a:defRPr sz="2000">
-                <a:solidFill>
-                  <a:srgbClr val="DCDCDC"/>
-                </a:solidFill>
-                <a:latin typeface="Consolas"/>
-              </a:defRPr>
-            </a:pPr>
-            <a:r>
-              <a:t>3. Emits interactive map + list of dead tests and untested lines</a:t>
+              </a:rPr>
+              <a:t>It emits an interactive map plus a list of dead tests
+and untested lines.</a:t>
             </a:r>
           </a:p>
         </p:txBody>
@@ -3764,7 +4172,7 @@
     <p:bg>
       <p:bgPr>
         <a:solidFill>
-          <a:srgbClr val="14141E"/>
+          <a:srgbClr val="F7F6F3"/>
         </a:solidFill>
         <a:effectLst/>
       </p:bgPr>
@@ -3784,8 +4192,8 @@
         </p:nvSpPr>
         <p:spPr>
           <a:xfrm>
-            <a:off x="457200" y="2286000"/>
-            <a:ext cx="8229600" cy="1371600"/>
+            <a:off x="822960" y="2834640"/>
+            <a:ext cx="7498080" cy="1097280"/>
           </a:xfrm>
           <a:prstGeom prst="rect">
             <a:avLst/>
@@ -3793,35 +4201,147 @@
           <a:noFill/>
         </p:spPr>
         <p:txBody>
-          <a:bodyPr wrap="square">
+          <a:bodyPr wrap="square" lIns="0" rIns="0" tIns="0" bIns="0">
             <a:spAutoFit/>
           </a:bodyPr>
           <a:lstStyle/>
           <a:p>
             <a:pPr algn="ctr">
-              <a:defRPr sz="4800" b="1">
+              <a:lnSpc>
+                <a:spcPct val="115000"/>
+              </a:lnSpc>
+              <a:spcAft>
+                <a:spcPts val="0"/>
+              </a:spcAft>
+            </a:pPr>
+            <a:r>
+              <a:rPr sz="3800" b="1">
                 <a:solidFill>
-                  <a:srgbClr val="4287F5"/>
+                  <a:srgbClr val="1E1E1E"/>
                 </a:solidFill>
                 <a:latin typeface="Consolas"/>
-              </a:defRPr>
+              </a:rPr>
+              <a:t>Install Marrow</a:t>
+            </a:r>
+          </a:p>
+        </p:txBody>
+      </p:sp>
+      <p:sp>
+        <p:nvSpPr>
+          <p:cNvPr id="3" name="Rectangle 2"/>
+          <p:cNvSpPr/>
+          <p:nvPr/>
+        </p:nvSpPr>
+        <p:spPr>
+          <a:xfrm>
+            <a:off x="3840480" y="3977639"/>
+            <a:ext cx="1463040" cy="50800"/>
+          </a:xfrm>
+          <a:prstGeom prst="rect">
+            <a:avLst/>
+          </a:prstGeom>
+          <a:solidFill>
+            <a:srgbClr val="C2410C"/>
+          </a:solidFill>
+          <a:ln>
+            <a:noFill/>
+          </a:ln>
+          <a:effectLst/>
+        </p:spPr>
+        <p:style>
+          <a:lnRef idx="1">
+            <a:schemeClr val="accent1"/>
+          </a:lnRef>
+          <a:fillRef idx="3">
+            <a:schemeClr val="accent1"/>
+          </a:fillRef>
+          <a:effectRef idx="2">
+            <a:schemeClr val="accent1"/>
+          </a:effectRef>
+          <a:fontRef idx="minor">
+            <a:schemeClr val="lt1"/>
+          </a:fontRef>
+        </p:style>
+        <p:txBody>
+          <a:bodyPr rtlCol="0" anchor="ctr"/>
+          <a:lstStyle/>
+          <a:p>
+            <a:pPr algn="ctr"/>
+          </a:p>
+        </p:txBody>
+      </p:sp>
+      <p:sp>
+        <p:nvSpPr>
+          <p:cNvPr id="4" name="Rectangle 3"/>
+          <p:cNvSpPr/>
+          <p:nvPr/>
+        </p:nvSpPr>
+        <p:spPr>
+          <a:xfrm>
+            <a:off x="1645920" y="4663440"/>
+            <a:ext cx="5852160" cy="1143000"/>
+          </a:xfrm>
+          <a:prstGeom prst="rect">
+            <a:avLst/>
+          </a:prstGeom>
+          <a:solidFill>
+            <a:srgbClr val="ECE8E1"/>
+          </a:solidFill>
+          <a:ln w="15875">
+            <a:solidFill>
+              <a:srgbClr val="C2410C"/>
+            </a:solidFill>
+          </a:ln>
+          <a:effectLst/>
+        </p:spPr>
+        <p:style>
+          <a:lnRef idx="1">
+            <a:schemeClr val="accent1"/>
+          </a:lnRef>
+          <a:fillRef idx="3">
+            <a:schemeClr val="accent1"/>
+          </a:fillRef>
+          <a:effectRef idx="2">
+            <a:schemeClr val="accent1"/>
+          </a:effectRef>
+          <a:fontRef idx="minor">
+            <a:schemeClr val="lt1"/>
+          </a:fontRef>
+        </p:style>
+        <p:txBody>
+          <a:bodyPr rtlCol="0" anchor="ctr" wrap="square"/>
+          <a:lstStyle/>
+          <a:p>
+            <a:pPr algn="ctr">
+              <a:lnSpc>
+                <a:spcPct val="115000"/>
+              </a:lnSpc>
+              <a:spcAft>
+                <a:spcPts val="0"/>
+              </a:spcAft>
             </a:pPr>
             <a:r>
-              <a:t>Install Marrow</a:t>
-            </a:r>
-          </a:p>
-        </p:txBody>
-      </p:sp>
-      <p:sp>
-        <p:nvSpPr>
-          <p:cNvPr id="3" name="TextBox 2"/>
+              <a:rPr sz="2800" b="1">
+                <a:solidFill>
+                  <a:srgbClr val="1E1E1E"/>
+                </a:solidFill>
+                <a:latin typeface="Consolas"/>
+              </a:rPr>
+              <a:t>pipx install marrow</a:t>
+            </a:r>
+          </a:p>
+        </p:txBody>
+      </p:sp>
+      <p:sp>
+        <p:nvSpPr>
+          <p:cNvPr id="5" name="TextBox 4"/>
           <p:cNvSpPr txBox="1"/>
           <p:nvPr/>
         </p:nvSpPr>
         <p:spPr>
           <a:xfrm>
-            <a:off x="457200" y="3840480"/>
-            <a:ext cx="8229600" cy="914400"/>
+            <a:off x="822960" y="6309360"/>
+            <a:ext cx="7498080" cy="640080"/>
           </a:xfrm>
           <a:prstGeom prst="rect">
             <a:avLst/>
@@ -3829,56 +4349,26 @@
           <a:noFill/>
         </p:spPr>
         <p:txBody>
-          <a:bodyPr wrap="square">
+          <a:bodyPr wrap="square" lIns="0" rIns="0" tIns="0" bIns="0">
             <a:spAutoFit/>
           </a:bodyPr>
           <a:lstStyle/>
           <a:p>
             <a:pPr algn="ctr">
-              <a:defRPr sz="3200">
+              <a:lnSpc>
+                <a:spcPct val="115000"/>
+              </a:lnSpc>
+              <a:spcAft>
+                <a:spcPts val="0"/>
+              </a:spcAft>
+            </a:pPr>
+            <a:r>
+              <a:rPr sz="2000" b="0">
                 <a:solidFill>
-                  <a:srgbClr val="4287F5"/>
+                  <a:srgbClr val="6B6762"/>
                 </a:solidFill>
                 <a:latin typeface="Consolas"/>
-              </a:defRPr>
-            </a:pPr>
-            <a:r>
-              <a:t>pipx install marrow</a:t>
-            </a:r>
-          </a:p>
-        </p:txBody>
-      </p:sp>
-      <p:sp>
-        <p:nvSpPr>
-          <p:cNvPr id="4" name="TextBox 3"/>
-          <p:cNvSpPr txBox="1"/>
-          <p:nvPr/>
-        </p:nvSpPr>
-        <p:spPr>
-          <a:xfrm>
-            <a:off x="457200" y="5303520"/>
-            <a:ext cx="8229600" cy="1828800"/>
-          </a:xfrm>
-          <a:prstGeom prst="rect">
-            <a:avLst/>
-          </a:prstGeom>
-          <a:noFill/>
-        </p:spPr>
-        <p:txBody>
-          <a:bodyPr wrap="square">
-            <a:spAutoFit/>
-          </a:bodyPr>
-          <a:lstStyle/>
-          <a:p>
-            <a:pPr algn="ctr">
-              <a:defRPr sz="2400">
-                <a:solidFill>
-                  <a:srgbClr val="DCDCDC"/>
-                </a:solidFill>
-                <a:latin typeface="Consolas"/>
-              </a:defRPr>
-            </a:pPr>
-            <a:r>
+              </a:rPr>
               <a:t>Works with pytest, Jest, go test.</a:t>
             </a:r>
           </a:p>

--- a/harness/out/pptx/pitch_deck/warm/deck.pptx
+++ b/harness/out/pptx/pitch_deck/warm/deck.pptx
@@ -3085,14 +3085,6 @@
 <file path=ppt/slides/slide1.xml><?xml version="1.0" encoding="utf-8"?>
 <p:sld xmlns:a="http://schemas.openxmlformats.org/drawingml/2006/main" xmlns:p="http://schemas.openxmlformats.org/presentationml/2006/main" xmlns:r="http://schemas.openxmlformats.org/officeDocument/2006/relationships">
   <p:cSld>
-    <p:bg>
-      <p:bgPr>
-        <a:solidFill>
-          <a:srgbClr val="F7F6F3"/>
-        </a:solidFill>
-        <a:effectLst/>
-      </p:bgPr>
-    </p:bg>
     <p:spTree>
       <p:nvGrpSpPr>
         <p:cNvPr id="1" name=""/>
@@ -3102,62 +3094,20 @@
       <p:grpSpPr/>
       <p:sp>
         <p:nvSpPr>
-          <p:cNvPr id="2" name="TextBox 1"/>
-          <p:cNvSpPr txBox="1"/>
-          <p:nvPr/>
-        </p:nvSpPr>
-        <p:spPr>
-          <a:xfrm>
-            <a:off x="822960" y="3200400"/>
-            <a:ext cx="7498080" cy="1463040"/>
-          </a:xfrm>
-          <a:prstGeom prst="rect">
-            <a:avLst/>
-          </a:prstGeom>
-          <a:noFill/>
-        </p:spPr>
-        <p:txBody>
-          <a:bodyPr wrap="square" lIns="0" rIns="0" tIns="0" bIns="0">
-            <a:spAutoFit/>
-          </a:bodyPr>
-          <a:lstStyle/>
-          <a:p>
-            <a:pPr algn="ctr">
-              <a:lnSpc>
-                <a:spcPct val="115000"/>
-              </a:lnSpc>
-              <a:spcAft>
-                <a:spcPts val="0"/>
-              </a:spcAft>
-            </a:pPr>
-            <a:r>
-              <a:rPr sz="7600" b="1">
-                <a:solidFill>
-                  <a:srgbClr val="1E1E1E"/>
-                </a:solidFill>
-                <a:latin typeface="Consolas"/>
-              </a:rPr>
-              <a:t>Marrow</a:t>
-            </a:r>
-          </a:p>
-        </p:txBody>
-      </p:sp>
-      <p:sp>
-        <p:nvSpPr>
-          <p:cNvPr id="3" name="Rectangle 2"/>
+          <p:cNvPr id="2" name="Rectangle 1"/>
           <p:cNvSpPr/>
           <p:nvPr/>
         </p:nvSpPr>
         <p:spPr>
           <a:xfrm>
-            <a:off x="3840480" y="4892040"/>
-            <a:ext cx="1463040" cy="50800"/>
+            <a:off x="0" y="0"/>
+            <a:ext cx="9144000" cy="9144000"/>
           </a:xfrm>
           <a:prstGeom prst="rect">
             <a:avLst/>
           </a:prstGeom>
           <a:solidFill>
-            <a:srgbClr val="C2410C"/>
+            <a:srgbClr val="F6F5F2"/>
           </a:solidFill>
           <a:ln>
             <a:noFill/>
@@ -3188,14 +3138,14 @@
       </p:sp>
       <p:sp>
         <p:nvSpPr>
-          <p:cNvPr id="4" name="TextBox 3"/>
+          <p:cNvPr id="3" name="TextBox 2"/>
           <p:cNvSpPr txBox="1"/>
           <p:nvPr/>
         </p:nvSpPr>
         <p:spPr>
           <a:xfrm>
-            <a:off x="822960" y="5440680"/>
-            <a:ext cx="7498080" cy="914400"/>
+            <a:off x="868680" y="3200400"/>
+            <a:ext cx="7406640" cy="1463040"/>
           </a:xfrm>
           <a:prstGeom prst="rect">
             <a:avLst/>
@@ -3210,130 +3160,20 @@
           <a:p>
             <a:pPr algn="ctr">
               <a:lnSpc>
-                <a:spcPct val="115000"/>
+                <a:spcPct val="100000"/>
               </a:lnSpc>
               <a:spcAft>
                 <a:spcPts val="0"/>
               </a:spcAft>
             </a:pPr>
             <a:r>
-              <a:rPr sz="2000" b="0">
-                <a:solidFill>
-                  <a:srgbClr val="6B6762"/>
+              <a:rPr sz="7600" b="1">
+                <a:solidFill>
+                  <a:srgbClr val="1B1B1E"/>
                 </a:solidFill>
                 <a:latin typeface="Consolas"/>
               </a:rPr>
-              <a:t>Know what your tests actually cover.</a:t>
-            </a:r>
-          </a:p>
-        </p:txBody>
-      </p:sp>
-    </p:spTree>
-  </p:cSld>
-  <p:clrMapOvr>
-    <a:masterClrMapping/>
-  </p:clrMapOvr>
-</p:sld>
-</file>
-
-<file path=ppt/slides/slide2.xml><?xml version="1.0" encoding="utf-8"?>
-<p:sld xmlns:a="http://schemas.openxmlformats.org/drawingml/2006/main" xmlns:p="http://schemas.openxmlformats.org/presentationml/2006/main" xmlns:r="http://schemas.openxmlformats.org/officeDocument/2006/relationships">
-  <p:cSld>
-    <p:bg>
-      <p:bgPr>
-        <a:solidFill>
-          <a:srgbClr val="F7F6F3"/>
-        </a:solidFill>
-        <a:effectLst/>
-      </p:bgPr>
-    </p:bg>
-    <p:spTree>
-      <p:nvGrpSpPr>
-        <p:cNvPr id="1" name=""/>
-        <p:cNvGrpSpPr/>
-        <p:nvPr/>
-      </p:nvGrpSpPr>
-      <p:grpSpPr/>
-      <p:sp>
-        <p:nvSpPr>
-          <p:cNvPr id="2" name="TextBox 1"/>
-          <p:cNvSpPr txBox="1"/>
-          <p:nvPr/>
-        </p:nvSpPr>
-        <p:spPr>
-          <a:xfrm>
-            <a:off x="822960" y="1005840"/>
-            <a:ext cx="7498080" cy="365760"/>
-          </a:xfrm>
-          <a:prstGeom prst="rect">
-            <a:avLst/>
-          </a:prstGeom>
-          <a:noFill/>
-        </p:spPr>
-        <p:txBody>
-          <a:bodyPr wrap="square" lIns="0" rIns="0" tIns="0" bIns="0">
-            <a:spAutoFit/>
-          </a:bodyPr>
-          <a:lstStyle/>
-          <a:p>
-            <a:pPr algn="ctr">
-              <a:lnSpc>
-                <a:spcPct val="115000"/>
-              </a:lnSpc>
-              <a:spcAft>
-                <a:spcPts val="0"/>
-              </a:spcAft>
-            </a:pPr>
-            <a:r>
-              <a:rPr sz="1500" b="0">
-                <a:solidFill>
-                  <a:srgbClr val="C2410C"/>
-                </a:solidFill>
-                <a:latin typeface="Consolas"/>
-              </a:rPr>
-              <a:t>THE PROBLEM</a:t>
-            </a:r>
-          </a:p>
-        </p:txBody>
-      </p:sp>
-      <p:sp>
-        <p:nvSpPr>
-          <p:cNvPr id="3" name="TextBox 2"/>
-          <p:cNvSpPr txBox="1"/>
-          <p:nvPr/>
-        </p:nvSpPr>
-        <p:spPr>
-          <a:xfrm>
-            <a:off x="822960" y="1508760"/>
-            <a:ext cx="7498080" cy="1828800"/>
-          </a:xfrm>
-          <a:prstGeom prst="rect">
-            <a:avLst/>
-          </a:prstGeom>
-          <a:noFill/>
-        </p:spPr>
-        <p:txBody>
-          <a:bodyPr wrap="square" lIns="0" rIns="0" tIns="0" bIns="0">
-            <a:spAutoFit/>
-          </a:bodyPr>
-          <a:lstStyle/>
-          <a:p>
-            <a:pPr algn="ctr">
-              <a:lnSpc>
-                <a:spcPct val="110000"/>
-              </a:lnSpc>
-              <a:spcAft>
-                <a:spcPts val="0"/>
-              </a:spcAft>
-            </a:pPr>
-            <a:r>
-              <a:rPr sz="3800" b="1">
-                <a:solidFill>
-                  <a:srgbClr val="1E1E1E"/>
-                </a:solidFill>
-                <a:latin typeface="Consolas"/>
-              </a:rPr>
-              <a:t>Big test suites hide their gaps.</a:t>
+              <a:t>Marrow</a:t>
             </a:r>
           </a:p>
         </p:txBody>
@@ -3346,8 +3186,8 @@
         </p:nvSpPr>
         <p:spPr>
           <a:xfrm>
-            <a:off x="4023360" y="3200400"/>
-            <a:ext cx="1097280" cy="50800"/>
+            <a:off x="3566160" y="4526280"/>
+            <a:ext cx="2011680" cy="44450"/>
           </a:xfrm>
           <a:prstGeom prst="rect">
             <a:avLst/>
@@ -3390,8 +3230,8 @@
         </p:nvSpPr>
         <p:spPr>
           <a:xfrm>
-            <a:off x="1280160" y="3931920"/>
-            <a:ext cx="6583680" cy="2743200"/>
+            <a:off x="868680" y="5029200"/>
+            <a:ext cx="7406640" cy="731520"/>
           </a:xfrm>
           <a:prstGeom prst="rect">
             <a:avLst/>
@@ -3406,7 +3246,7 @@
           <a:p>
             <a:pPr algn="ctr">
               <a:lnSpc>
-                <a:spcPct val="140000"/>
+                <a:spcPct val="125000"/>
               </a:lnSpc>
               <a:spcAft>
                 <a:spcPts val="0"/>
@@ -3415,33 +3255,95 @@
             <a:r>
               <a:rPr sz="2000" b="0">
                 <a:solidFill>
-                  <a:srgbClr val="1E1E1E"/>
+                  <a:srgbClr val="6B6B73"/>
                 </a:solidFill>
                 <a:latin typeface="Consolas"/>
               </a:rPr>
-              <a:t>Large suites are slow, and nobody knows which tests cover which code.</a:t>
-            </a:r>
-          </a:p>
+              <a:t>Know what your tests actually cover.</a:t>
+            </a:r>
+          </a:p>
+        </p:txBody>
+      </p:sp>
+      <p:sp>
+        <p:nvSpPr>
+          <p:cNvPr id="6" name="TextBox 5"/>
+          <p:cNvSpPr txBox="1"/>
+          <p:nvPr/>
+        </p:nvSpPr>
+        <p:spPr>
+          <a:xfrm>
+            <a:off x="868680" y="5852160"/>
+            <a:ext cx="7406640" cy="457200"/>
+          </a:xfrm>
+          <a:prstGeom prst="rect">
+            <a:avLst/>
+          </a:prstGeom>
+          <a:noFill/>
+        </p:spPr>
+        <p:txBody>
+          <a:bodyPr wrap="square" lIns="0" rIns="0" tIns="0" bIns="0">
+            <a:spAutoFit/>
+          </a:bodyPr>
+          <a:lstStyle/>
           <a:p>
             <a:pPr algn="ctr">
               <a:lnSpc>
-                <a:spcPct val="140000"/>
+                <a:spcPct val="125000"/>
               </a:lnSpc>
-              <a:spcBef>
-                <a:spcPts val="2600"/>
-              </a:spcBef>
               <a:spcAft>
                 <a:spcPts val="0"/>
               </a:spcAft>
             </a:pPr>
             <a:r>
-              <a:rPr sz="2000" b="0">
-                <a:solidFill>
-                  <a:srgbClr val="6B6762"/>
+              <a:rPr sz="1500" b="0">
+                <a:solidFill>
+                  <a:srgbClr val="C2410C"/>
                 </a:solidFill>
                 <a:latin typeface="Consolas"/>
               </a:rPr>
-              <a:t>So dead tests linger — and real gaps go unnoticed.</a:t>
+              <a:t>$ marrow watch -- pytest</a:t>
+            </a:r>
+          </a:p>
+        </p:txBody>
+      </p:sp>
+      <p:sp>
+        <p:nvSpPr>
+          <p:cNvPr id="7" name="TextBox 6"/>
+          <p:cNvSpPr txBox="1"/>
+          <p:nvPr/>
+        </p:nvSpPr>
+        <p:spPr>
+          <a:xfrm>
+            <a:off x="868680" y="8366760"/>
+            <a:ext cx="7406640" cy="365760"/>
+          </a:xfrm>
+          <a:prstGeom prst="rect">
+            <a:avLst/>
+          </a:prstGeom>
+          <a:noFill/>
+        </p:spPr>
+        <p:txBody>
+          <a:bodyPr wrap="square" lIns="0" rIns="0" tIns="0" bIns="0">
+            <a:spAutoFit/>
+          </a:bodyPr>
+          <a:lstStyle/>
+          <a:p>
+            <a:pPr algn="ctr">
+              <a:lnSpc>
+                <a:spcPct val="125000"/>
+              </a:lnSpc>
+              <a:spcAft>
+                <a:spcPts val="0"/>
+              </a:spcAft>
+            </a:pPr>
+            <a:r>
+              <a:rPr sz="1050" b="0">
+                <a:solidFill>
+                  <a:srgbClr val="6B6B73"/>
+                </a:solidFill>
+                <a:latin typeface="Consolas"/>
+              </a:rPr>
+              <a:t>a CLI that maps tests to the code they cover</a:t>
             </a:r>
           </a:p>
         </p:txBody>
@@ -3454,17 +3356,9 @@
 </p:sld>
 </file>
 
-<file path=ppt/slides/slide3.xml><?xml version="1.0" encoding="utf-8"?>
+<file path=ppt/slides/slide2.xml><?xml version="1.0" encoding="utf-8"?>
 <p:sld xmlns:a="http://schemas.openxmlformats.org/drawingml/2006/main" xmlns:p="http://schemas.openxmlformats.org/presentationml/2006/main" xmlns:r="http://schemas.openxmlformats.org/officeDocument/2006/relationships">
   <p:cSld>
-    <p:bg>
-      <p:bgPr>
-        <a:solidFill>
-          <a:srgbClr val="F7F6F3"/>
-        </a:solidFill>
-        <a:effectLst/>
-      </p:bgPr>
-    </p:bg>
     <p:spTree>
       <p:nvGrpSpPr>
         <p:cNvPr id="1" name=""/>
@@ -3474,105 +3368,20 @@
       <p:grpSpPr/>
       <p:sp>
         <p:nvSpPr>
-          <p:cNvPr id="2" name="TextBox 1"/>
-          <p:cNvSpPr txBox="1"/>
-          <p:nvPr/>
-        </p:nvSpPr>
-        <p:spPr>
-          <a:xfrm>
-            <a:off x="822960" y="1005840"/>
-            <a:ext cx="7498080" cy="365760"/>
-          </a:xfrm>
-          <a:prstGeom prst="rect">
-            <a:avLst/>
-          </a:prstGeom>
-          <a:noFill/>
-        </p:spPr>
-        <p:txBody>
-          <a:bodyPr wrap="square" lIns="0" rIns="0" tIns="0" bIns="0">
-            <a:spAutoFit/>
-          </a:bodyPr>
-          <a:lstStyle/>
-          <a:p>
-            <a:pPr algn="ctr">
-              <a:lnSpc>
-                <a:spcPct val="115000"/>
-              </a:lnSpc>
-              <a:spcAft>
-                <a:spcPts val="0"/>
-              </a:spcAft>
-            </a:pPr>
-            <a:r>
-              <a:rPr sz="1500" b="0">
-                <a:solidFill>
-                  <a:srgbClr val="C2410C"/>
-                </a:solidFill>
-                <a:latin typeface="Consolas"/>
-              </a:rPr>
-              <a:t>THE IDEA</a:t>
-            </a:r>
-          </a:p>
-        </p:txBody>
-      </p:sp>
-      <p:sp>
-        <p:nvSpPr>
-          <p:cNvPr id="3" name="TextBox 2"/>
-          <p:cNvSpPr txBox="1"/>
-          <p:nvPr/>
-        </p:nvSpPr>
-        <p:spPr>
-          <a:xfrm>
-            <a:off x="822960" y="1508760"/>
-            <a:ext cx="7498080" cy="1828800"/>
-          </a:xfrm>
-          <a:prstGeom prst="rect">
-            <a:avLst/>
-          </a:prstGeom>
-          <a:noFill/>
-        </p:spPr>
-        <p:txBody>
-          <a:bodyPr wrap="square" lIns="0" rIns="0" tIns="0" bIns="0">
-            <a:spAutoFit/>
-          </a:bodyPr>
-          <a:lstStyle/>
-          <a:p>
-            <a:pPr algn="ctr">
-              <a:lnSpc>
-                <a:spcPct val="110000"/>
-              </a:lnSpc>
-              <a:spcAft>
-                <a:spcPts val="0"/>
-              </a:spcAft>
-            </a:pPr>
-            <a:r>
-              <a:rPr sz="3800" b="1">
-                <a:solidFill>
-                  <a:srgbClr val="1E1E1E"/>
-                </a:solidFill>
-                <a:latin typeface="Consolas"/>
-              </a:rPr>
-              <a:t>Watch one run.
-Draw the real map.</a:t>
-            </a:r>
-          </a:p>
-        </p:txBody>
-      </p:sp>
-      <p:sp>
-        <p:nvSpPr>
-          <p:cNvPr id="4" name="Rectangle 3"/>
+          <p:cNvPr id="2" name="Rectangle 1"/>
           <p:cNvSpPr/>
           <p:nvPr/>
         </p:nvSpPr>
         <p:spPr>
           <a:xfrm>
-            <a:off x="4023360" y="3840480"/>
-            <a:ext cx="1097280" cy="50800"/>
+            <a:off x="0" y="0"/>
+            <a:ext cx="9144000" cy="9144000"/>
           </a:xfrm>
           <a:prstGeom prst="rect">
             <a:avLst/>
           </a:prstGeom>
           <a:solidFill>
-            <a:srgbClr val="C2410C"/>
+            <a:srgbClr val="F6F5F2"/>
           </a:solidFill>
           <a:ln>
             <a:noFill/>
@@ -3603,166 +3412,14 @@
       </p:sp>
       <p:sp>
         <p:nvSpPr>
-          <p:cNvPr id="5" name="TextBox 4"/>
-          <p:cNvSpPr txBox="1"/>
-          <p:nvPr/>
-        </p:nvSpPr>
-        <p:spPr>
-          <a:xfrm>
-            <a:off x="1280160" y="4572000"/>
-            <a:ext cx="6583680" cy="2194560"/>
-          </a:xfrm>
-          <a:prstGeom prst="rect">
-            <a:avLst/>
-          </a:prstGeom>
-          <a:noFill/>
-        </p:spPr>
-        <p:txBody>
-          <a:bodyPr wrap="square" lIns="0" rIns="0" tIns="0" bIns="0">
-            <a:spAutoFit/>
-          </a:bodyPr>
-          <a:lstStyle/>
-          <a:p>
-            <a:pPr algn="ctr">
-              <a:lnSpc>
-                <a:spcPct val="140000"/>
-              </a:lnSpc>
-              <a:spcAft>
-                <a:spcPts val="0"/>
-              </a:spcAft>
-            </a:pPr>
-            <a:r>
-              <a:rPr sz="2000" b="0">
-                <a:solidFill>
-                  <a:srgbClr val="1E1E1E"/>
-                </a:solidFill>
-                <a:latin typeface="Consolas"/>
-              </a:rPr>
-              <a:t>Marrow instruments a single test run and produces a test→code coverage map.</a:t>
-            </a:r>
-          </a:p>
-        </p:txBody>
-      </p:sp>
-      <p:sp>
-        <p:nvSpPr>
-          <p:cNvPr id="6" name="TextBox 5"/>
-          <p:cNvSpPr txBox="1"/>
-          <p:nvPr/>
-        </p:nvSpPr>
-        <p:spPr>
-          <a:xfrm>
-            <a:off x="822960" y="6309360"/>
-            <a:ext cx="7498080" cy="548640"/>
-          </a:xfrm>
-          <a:prstGeom prst="rect">
-            <a:avLst/>
-          </a:prstGeom>
-          <a:noFill/>
-        </p:spPr>
-        <p:txBody>
-          <a:bodyPr wrap="square" lIns="0" rIns="0" tIns="0" bIns="0">
-            <a:spAutoFit/>
-          </a:bodyPr>
-          <a:lstStyle/>
-          <a:p>
-            <a:pPr algn="ctr">
-              <a:lnSpc>
-                <a:spcPct val="115000"/>
-              </a:lnSpc>
-              <a:spcAft>
-                <a:spcPts val="0"/>
-              </a:spcAft>
-            </a:pPr>
-            <a:r>
-              <a:rPr sz="2000" b="1">
-                <a:solidFill>
-                  <a:srgbClr val="C2410C"/>
-                </a:solidFill>
-                <a:latin typeface="Consolas"/>
-              </a:rPr>
-              <a:t>No annotations. No config.</a:t>
-            </a:r>
-          </a:p>
-        </p:txBody>
-      </p:sp>
-    </p:spTree>
-  </p:cSld>
-  <p:clrMapOvr>
-    <a:masterClrMapping/>
-  </p:clrMapOvr>
-</p:sld>
-</file>
-
-<file path=ppt/slides/slide4.xml><?xml version="1.0" encoding="utf-8"?>
-<p:sld xmlns:a="http://schemas.openxmlformats.org/drawingml/2006/main" xmlns:p="http://schemas.openxmlformats.org/presentationml/2006/main" xmlns:r="http://schemas.openxmlformats.org/officeDocument/2006/relationships">
-  <p:cSld>
-    <p:bg>
-      <p:bgPr>
-        <a:solidFill>
-          <a:srgbClr val="F7F6F3"/>
-        </a:solidFill>
-        <a:effectLst/>
-      </p:bgPr>
-    </p:bg>
-    <p:spTree>
-      <p:nvGrpSpPr>
-        <p:cNvPr id="1" name=""/>
-        <p:cNvGrpSpPr/>
-        <p:nvPr/>
-      </p:nvGrpSpPr>
-      <p:grpSpPr/>
-      <p:sp>
-        <p:nvSpPr>
-          <p:cNvPr id="2" name="TextBox 1"/>
-          <p:cNvSpPr txBox="1"/>
-          <p:nvPr/>
-        </p:nvSpPr>
-        <p:spPr>
-          <a:xfrm>
-            <a:off x="822960" y="1005840"/>
-            <a:ext cx="7498080" cy="365760"/>
-          </a:xfrm>
-          <a:prstGeom prst="rect">
-            <a:avLst/>
-          </a:prstGeom>
-          <a:noFill/>
-        </p:spPr>
-        <p:txBody>
-          <a:bodyPr wrap="square" lIns="0" rIns="0" tIns="0" bIns="0">
-            <a:spAutoFit/>
-          </a:bodyPr>
-          <a:lstStyle/>
-          <a:p>
-            <a:pPr algn="ctr">
-              <a:lnSpc>
-                <a:spcPct val="115000"/>
-              </a:lnSpc>
-              <a:spcAft>
-                <a:spcPts val="0"/>
-              </a:spcAft>
-            </a:pPr>
-            <a:r>
-              <a:rPr sz="1500" b="0">
-                <a:solidFill>
-                  <a:srgbClr val="C2410C"/>
-                </a:solidFill>
-                <a:latin typeface="Consolas"/>
-              </a:rPr>
-              <a:t>THREE STEPS</a:t>
-            </a:r>
-          </a:p>
-        </p:txBody>
-      </p:sp>
-      <p:sp>
-        <p:nvSpPr>
           <p:cNvPr id="3" name="TextBox 2"/>
           <p:cNvSpPr txBox="1"/>
           <p:nvPr/>
         </p:nvSpPr>
         <p:spPr>
           <a:xfrm>
-            <a:off x="822960" y="1508760"/>
-            <a:ext cx="7498080" cy="1828800"/>
+            <a:off x="868680" y="914400"/>
+            <a:ext cx="7406640" cy="1280160"/>
           </a:xfrm>
           <a:prstGeom prst="rect">
             <a:avLst/>
@@ -3784,13 +3441,13 @@
               </a:spcAft>
             </a:pPr>
             <a:r>
-              <a:rPr sz="3800" b="1">
-                <a:solidFill>
-                  <a:srgbClr val="1E1E1E"/>
+              <a:rPr sz="3000" b="1">
+                <a:solidFill>
+                  <a:srgbClr val="1B1B1E"/>
                 </a:solidFill>
                 <a:latin typeface="Consolas"/>
               </a:rPr>
-              <a:t>How it works</a:t>
+              <a:t>Big test suites hide their gaps.</a:t>
             </a:r>
           </a:p>
         </p:txBody>
@@ -3803,8 +3460,8 @@
         </p:nvSpPr>
         <p:spPr>
           <a:xfrm>
-            <a:off x="4023360" y="2926080"/>
-            <a:ext cx="1097280" cy="50800"/>
+            <a:off x="3840480" y="1874519"/>
+            <a:ext cx="1463040" cy="44450"/>
           </a:xfrm>
           <a:prstGeom prst="rect">
             <a:avLst/>
@@ -3847,8 +3504,8 @@
         </p:nvSpPr>
         <p:spPr>
           <a:xfrm>
-            <a:off x="1005840" y="3657600"/>
-            <a:ext cx="822960" cy="457200"/>
+            <a:off x="868680" y="8366760"/>
+            <a:ext cx="7406640" cy="365760"/>
           </a:xfrm>
           <a:prstGeom prst="rect">
             <a:avLst/>
@@ -3861,22 +3518,33 @@
           </a:bodyPr>
           <a:lstStyle/>
           <a:p>
-            <a:pPr algn="l">
-              <a:lnSpc>
-                <a:spcPct val="115000"/>
-              </a:lnSpc>
-              <a:spcAft>
-                <a:spcPts val="0"/>
-              </a:spcAft>
-            </a:pPr>
-            <a:r>
-              <a:rPr sz="2000" b="1">
-                <a:solidFill>
-                  <a:srgbClr val="C2410C"/>
+            <a:pPr algn="l"/>
+            <a:r>
+              <a:rPr sz="1050">
+                <a:solidFill>
+                  <a:srgbClr val="6B6B73"/>
                 </a:solidFill>
                 <a:latin typeface="Consolas"/>
               </a:rPr>
-              <a:t>01</a:t>
+              <a:t>the problem</a:t>
+            </a:r>
+            <a:r>
+              <a:rPr sz="1050">
+                <a:solidFill>
+                  <a:srgbClr val="6B6B73"/>
+                </a:solidFill>
+                <a:latin typeface="Consolas"/>
+              </a:rPr>
+              <a:t>   ·   </a:t>
+            </a:r>
+            <a:r>
+              <a:rPr sz="1050">
+                <a:solidFill>
+                  <a:srgbClr val="C2410C"/>
+                </a:solidFill>
+                <a:latin typeface="Consolas"/>
+              </a:rPr>
+              <a:t>02</a:t>
             </a:r>
           </a:p>
         </p:txBody>
@@ -3889,8 +3557,8 @@
         </p:nvSpPr>
         <p:spPr>
           <a:xfrm>
-            <a:off x="1920240" y="3657600"/>
-            <a:ext cx="6217920" cy="1371600"/>
+            <a:off x="868680" y="2834640"/>
+            <a:ext cx="7406640" cy="2743200"/>
           </a:xfrm>
           <a:prstGeom prst="rect">
             <a:avLst/>
@@ -3905,20 +3573,20 @@
           <a:p>
             <a:pPr algn="l">
               <a:lnSpc>
-                <a:spcPct val="115000"/>
+                <a:spcPct val="135000"/>
               </a:lnSpc>
               <a:spcAft>
-                <a:spcPts val="0"/>
+                <a:spcPts val="2000"/>
               </a:spcAft>
             </a:pPr>
             <a:r>
-              <a:rPr sz="2000" b="1">
-                <a:solidFill>
-                  <a:srgbClr val="1E1E1E"/>
+              <a:rPr sz="2000" b="0">
+                <a:solidFill>
+                  <a:srgbClr val="1B1B1E"/>
                 </a:solidFill>
                 <a:latin typeface="Consolas"/>
               </a:rPr>
-              <a:t>Run</a:t>
+              <a:t>Large suites are slow, and nobody knows</a:t>
             </a:r>
           </a:p>
           <a:p>
@@ -3926,316 +3594,32 @@
               <a:lnSpc>
                 <a:spcPct val="135000"/>
               </a:lnSpc>
-              <a:spcBef>
-                <a:spcPts val="600"/>
-              </a:spcBef>
               <a:spcAft>
-                <a:spcPts val="0"/>
+                <a:spcPts val="2000"/>
               </a:spcAft>
             </a:pPr>
             <a:r>
-              <a:rPr sz="1500" b="0">
-                <a:solidFill>
-                  <a:srgbClr val="6B6762"/>
+              <a:rPr sz="2000" b="0">
+                <a:solidFill>
+                  <a:srgbClr val="1B1B1E"/>
                 </a:solidFill>
                 <a:latin typeface="Consolas"/>
               </a:rPr>
-              <a:t>marrow watch -- &lt;your test cmd&gt;</a:t>
-            </a:r>
-          </a:p>
-        </p:txBody>
-      </p:sp>
-      <p:sp>
-        <p:nvSpPr>
-          <p:cNvPr id="7" name="TextBox 6"/>
-          <p:cNvSpPr txBox="1"/>
-          <p:nvPr/>
-        </p:nvSpPr>
-        <p:spPr>
-          <a:xfrm>
-            <a:off x="1005840" y="5074920"/>
-            <a:ext cx="822960" cy="457200"/>
-          </a:xfrm>
-          <a:prstGeom prst="rect">
-            <a:avLst/>
-          </a:prstGeom>
-          <a:noFill/>
-        </p:spPr>
-        <p:txBody>
-          <a:bodyPr wrap="square" lIns="0" rIns="0" tIns="0" bIns="0">
-            <a:spAutoFit/>
-          </a:bodyPr>
-          <a:lstStyle/>
-          <a:p>
-            <a:pPr algn="l">
-              <a:lnSpc>
-                <a:spcPct val="115000"/>
-              </a:lnSpc>
-              <a:spcAft>
-                <a:spcPts val="0"/>
-              </a:spcAft>
-            </a:pPr>
-            <a:r>
-              <a:rPr sz="2000" b="1">
-                <a:solidFill>
-                  <a:srgbClr val="C2410C"/>
-                </a:solidFill>
-                <a:latin typeface="Consolas"/>
-              </a:rPr>
-              <a:t>02</a:t>
-            </a:r>
-          </a:p>
-        </p:txBody>
-      </p:sp>
-      <p:sp>
-        <p:nvSpPr>
-          <p:cNvPr id="8" name="TextBox 7"/>
-          <p:cNvSpPr txBox="1"/>
-          <p:nvPr/>
-        </p:nvSpPr>
-        <p:spPr>
-          <a:xfrm>
-            <a:off x="1920240" y="5074920"/>
-            <a:ext cx="6217920" cy="1371600"/>
-          </a:xfrm>
-          <a:prstGeom prst="rect">
-            <a:avLst/>
-          </a:prstGeom>
-          <a:noFill/>
-        </p:spPr>
-        <p:txBody>
-          <a:bodyPr wrap="square" lIns="0" rIns="0" tIns="0" bIns="0">
-            <a:spAutoFit/>
-          </a:bodyPr>
-          <a:lstStyle/>
-          <a:p>
-            <a:pPr algn="l">
-              <a:lnSpc>
-                <a:spcPct val="115000"/>
-              </a:lnSpc>
-              <a:spcAft>
-                <a:spcPts val="0"/>
-              </a:spcAft>
-            </a:pPr>
-            <a:r>
-              <a:rPr sz="2000" b="1">
-                <a:solidFill>
-                  <a:srgbClr val="1E1E1E"/>
-                </a:solidFill>
-                <a:latin typeface="Consolas"/>
-              </a:rPr>
-              <a:t>Record</a:t>
-            </a:r>
-          </a:p>
-          <a:p>
-            <a:pPr algn="l">
-              <a:lnSpc>
-                <a:spcPct val="135000"/>
-              </a:lnSpc>
-              <a:spcBef>
-                <a:spcPts val="600"/>
-              </a:spcBef>
-              <a:spcAft>
-                <a:spcPts val="0"/>
-              </a:spcAft>
-            </a:pPr>
-            <a:r>
-              <a:rPr sz="1500" b="0">
-                <a:solidFill>
-                  <a:srgbClr val="6B6762"/>
-                </a:solidFill>
-                <a:latin typeface="Consolas"/>
-              </a:rPr>
-              <a:t>Marrow records which lines each test exercised.</a:t>
-            </a:r>
-          </a:p>
-        </p:txBody>
-      </p:sp>
-      <p:sp>
-        <p:nvSpPr>
-          <p:cNvPr id="9" name="TextBox 8"/>
-          <p:cNvSpPr txBox="1"/>
-          <p:nvPr/>
-        </p:nvSpPr>
-        <p:spPr>
-          <a:xfrm>
-            <a:off x="1005840" y="6492240"/>
-            <a:ext cx="822960" cy="457200"/>
-          </a:xfrm>
-          <a:prstGeom prst="rect">
-            <a:avLst/>
-          </a:prstGeom>
-          <a:noFill/>
-        </p:spPr>
-        <p:txBody>
-          <a:bodyPr wrap="square" lIns="0" rIns="0" tIns="0" bIns="0">
-            <a:spAutoFit/>
-          </a:bodyPr>
-          <a:lstStyle/>
-          <a:p>
-            <a:pPr algn="l">
-              <a:lnSpc>
-                <a:spcPct val="115000"/>
-              </a:lnSpc>
-              <a:spcAft>
-                <a:spcPts val="0"/>
-              </a:spcAft>
-            </a:pPr>
-            <a:r>
-              <a:rPr sz="2000" b="1">
-                <a:solidFill>
-                  <a:srgbClr val="C2410C"/>
-                </a:solidFill>
-                <a:latin typeface="Consolas"/>
-              </a:rPr>
-              <a:t>03</a:t>
-            </a:r>
-          </a:p>
-        </p:txBody>
-      </p:sp>
-      <p:sp>
-        <p:nvSpPr>
-          <p:cNvPr id="10" name="TextBox 9"/>
-          <p:cNvSpPr txBox="1"/>
-          <p:nvPr/>
-        </p:nvSpPr>
-        <p:spPr>
-          <a:xfrm>
-            <a:off x="1920240" y="6492240"/>
-            <a:ext cx="6217920" cy="1371600"/>
-          </a:xfrm>
-          <a:prstGeom prst="rect">
-            <a:avLst/>
-          </a:prstGeom>
-          <a:noFill/>
-        </p:spPr>
-        <p:txBody>
-          <a:bodyPr wrap="square" lIns="0" rIns="0" tIns="0" bIns="0">
-            <a:spAutoFit/>
-          </a:bodyPr>
-          <a:lstStyle/>
-          <a:p>
-            <a:pPr algn="l">
-              <a:lnSpc>
-                <a:spcPct val="115000"/>
-              </a:lnSpc>
-              <a:spcAft>
-                <a:spcPts val="0"/>
-              </a:spcAft>
-            </a:pPr>
-            <a:r>
-              <a:rPr sz="2000" b="1">
-                <a:solidFill>
-                  <a:srgbClr val="1E1E1E"/>
-                </a:solidFill>
-                <a:latin typeface="Consolas"/>
-              </a:rPr>
-              <a:t>Map</a:t>
-            </a:r>
-          </a:p>
-          <a:p>
-            <a:pPr algn="l">
-              <a:lnSpc>
-                <a:spcPct val="135000"/>
-              </a:lnSpc>
-              <a:spcBef>
-                <a:spcPts val="600"/>
-              </a:spcBef>
-              <a:spcAft>
-                <a:spcPts val="0"/>
-              </a:spcAft>
-            </a:pPr>
-            <a:r>
-              <a:rPr sz="1500" b="0">
-                <a:solidFill>
-                  <a:srgbClr val="6B6762"/>
-                </a:solidFill>
-                <a:latin typeface="Consolas"/>
-              </a:rPr>
-              <a:t>It emits an interactive map plus a list of dead tests
-and untested lines.</a:t>
-            </a:r>
-          </a:p>
-        </p:txBody>
-      </p:sp>
-    </p:spTree>
-  </p:cSld>
-  <p:clrMapOvr>
-    <a:masterClrMapping/>
-  </p:clrMapOvr>
-</p:sld>
-</file>
-
-<file path=ppt/slides/slide5.xml><?xml version="1.0" encoding="utf-8"?>
-<p:sld xmlns:a="http://schemas.openxmlformats.org/drawingml/2006/main" xmlns:p="http://schemas.openxmlformats.org/presentationml/2006/main" xmlns:r="http://schemas.openxmlformats.org/officeDocument/2006/relationships">
-  <p:cSld>
-    <p:bg>
-      <p:bgPr>
-        <a:solidFill>
-          <a:srgbClr val="F7F6F3"/>
-        </a:solidFill>
-        <a:effectLst/>
-      </p:bgPr>
-    </p:bg>
-    <p:spTree>
-      <p:nvGrpSpPr>
-        <p:cNvPr id="1" name=""/>
-        <p:cNvGrpSpPr/>
-        <p:nvPr/>
-      </p:nvGrpSpPr>
-      <p:grpSpPr/>
-      <p:sp>
-        <p:nvSpPr>
-          <p:cNvPr id="2" name="TextBox 1"/>
-          <p:cNvSpPr txBox="1"/>
-          <p:nvPr/>
-        </p:nvSpPr>
-        <p:spPr>
-          <a:xfrm>
-            <a:off x="822960" y="2834640"/>
-            <a:ext cx="7498080" cy="1097280"/>
-          </a:xfrm>
-          <a:prstGeom prst="rect">
-            <a:avLst/>
-          </a:prstGeom>
-          <a:noFill/>
-        </p:spPr>
-        <p:txBody>
-          <a:bodyPr wrap="square" lIns="0" rIns="0" tIns="0" bIns="0">
-            <a:spAutoFit/>
-          </a:bodyPr>
-          <a:lstStyle/>
-          <a:p>
-            <a:pPr algn="ctr">
-              <a:lnSpc>
-                <a:spcPct val="115000"/>
-              </a:lnSpc>
-              <a:spcAft>
-                <a:spcPts val="0"/>
-              </a:spcAft>
-            </a:pPr>
-            <a:r>
-              <a:rPr sz="3800" b="1">
-                <a:solidFill>
-                  <a:srgbClr val="1E1E1E"/>
-                </a:solidFill>
-                <a:latin typeface="Consolas"/>
-              </a:rPr>
-              <a:t>Install Marrow</a:t>
-            </a:r>
-          </a:p>
-        </p:txBody>
-      </p:sp>
-      <p:sp>
-        <p:nvSpPr>
-          <p:cNvPr id="3" name="Rectangle 2"/>
+              <a:t>which tests cover which code.</a:t>
+            </a:r>
+          </a:p>
+        </p:txBody>
+      </p:sp>
+      <p:sp>
+        <p:nvSpPr>
+          <p:cNvPr id="7" name="Rectangle 6"/>
           <p:cNvSpPr/>
           <p:nvPr/>
         </p:nvSpPr>
         <p:spPr>
           <a:xfrm>
-            <a:off x="3840480" y="3977639"/>
-            <a:ext cx="1463040" cy="50800"/>
+            <a:off x="868680" y="4315968"/>
+            <a:ext cx="201168" cy="114300"/>
           </a:xfrm>
           <a:prstGeom prst="rect">
             <a:avLst/>
@@ -4272,25 +3656,107 @@
       </p:sp>
       <p:sp>
         <p:nvSpPr>
-          <p:cNvPr id="4" name="Rectangle 3"/>
+          <p:cNvPr id="8" name="TextBox 7"/>
+          <p:cNvSpPr txBox="1"/>
+          <p:nvPr/>
+        </p:nvSpPr>
+        <p:spPr>
+          <a:xfrm>
+            <a:off x="1371600" y="4206240"/>
+            <a:ext cx="6903720" cy="914400"/>
+          </a:xfrm>
+          <a:prstGeom prst="rect">
+            <a:avLst/>
+          </a:prstGeom>
+          <a:noFill/>
+        </p:spPr>
+        <p:txBody>
+          <a:bodyPr wrap="square" lIns="0" rIns="0" tIns="0" bIns="0">
+            <a:spAutoFit/>
+          </a:bodyPr>
+          <a:lstStyle/>
+          <a:p>
+            <a:pPr algn="l">
+              <a:lnSpc>
+                <a:spcPct val="120000"/>
+              </a:lnSpc>
+              <a:spcAft>
+                <a:spcPts val="0"/>
+              </a:spcAft>
+            </a:pPr>
+            <a:r>
+              <a:rPr sz="1600" b="1">
+                <a:solidFill>
+                  <a:srgbClr val="1B1B1E"/>
+                </a:solidFill>
+                <a:latin typeface="Consolas"/>
+              </a:rPr>
+              <a:t>Dead tests linger.</a:t>
+            </a:r>
+          </a:p>
+        </p:txBody>
+      </p:sp>
+      <p:sp>
+        <p:nvSpPr>
+          <p:cNvPr id="9" name="TextBox 8"/>
+          <p:cNvSpPr txBox="1"/>
+          <p:nvPr/>
+        </p:nvSpPr>
+        <p:spPr>
+          <a:xfrm>
+            <a:off x="1371600" y="4517136"/>
+            <a:ext cx="6903720" cy="548640"/>
+          </a:xfrm>
+          <a:prstGeom prst="rect">
+            <a:avLst/>
+          </a:prstGeom>
+          <a:noFill/>
+        </p:spPr>
+        <p:txBody>
+          <a:bodyPr wrap="square" lIns="0" rIns="0" tIns="0" bIns="0">
+            <a:spAutoFit/>
+          </a:bodyPr>
+          <a:lstStyle/>
+          <a:p>
+            <a:pPr algn="l">
+              <a:lnSpc>
+                <a:spcPct val="120000"/>
+              </a:lnSpc>
+              <a:spcAft>
+                <a:spcPts val="0"/>
+              </a:spcAft>
+            </a:pPr>
+            <a:r>
+              <a:rPr sz="1600" b="0">
+                <a:solidFill>
+                  <a:srgbClr val="6B6B73"/>
+                </a:solidFill>
+                <a:latin typeface="Consolas"/>
+              </a:rPr>
+              <a:t>They pass forever and guard nothing.</a:t>
+            </a:r>
+          </a:p>
+        </p:txBody>
+      </p:sp>
+      <p:sp>
+        <p:nvSpPr>
+          <p:cNvPr id="10" name="Rectangle 9"/>
           <p:cNvSpPr/>
           <p:nvPr/>
         </p:nvSpPr>
         <p:spPr>
           <a:xfrm>
-            <a:off x="1645920" y="4663440"/>
-            <a:ext cx="5852160" cy="1143000"/>
+            <a:off x="868680" y="5367528"/>
+            <a:ext cx="201168" cy="114300"/>
           </a:xfrm>
           <a:prstGeom prst="rect">
             <a:avLst/>
           </a:prstGeom>
           <a:solidFill>
-            <a:srgbClr val="ECE8E1"/>
+            <a:srgbClr val="C2410C"/>
           </a:solidFill>
-          <a:ln w="15875">
-            <a:solidFill>
-              <a:srgbClr val="C2410C"/>
-            </a:solidFill>
+          <a:ln>
+            <a:noFill/>
           </a:ln>
           <a:effectLst/>
         </p:spPr>
@@ -4309,10 +3775,895 @@
           </a:fontRef>
         </p:style>
         <p:txBody>
-          <a:bodyPr rtlCol="0" anchor="ctr" wrap="square"/>
+          <a:bodyPr rtlCol="0" anchor="ctr"/>
+          <a:lstStyle/>
+          <a:p>
+            <a:pPr algn="ctr"/>
+          </a:p>
+        </p:txBody>
+      </p:sp>
+      <p:sp>
+        <p:nvSpPr>
+          <p:cNvPr id="11" name="TextBox 10"/>
+          <p:cNvSpPr txBox="1"/>
+          <p:nvPr/>
+        </p:nvSpPr>
+        <p:spPr>
+          <a:xfrm>
+            <a:off x="1371600" y="5257800"/>
+            <a:ext cx="6903720" cy="914400"/>
+          </a:xfrm>
+          <a:prstGeom prst="rect">
+            <a:avLst/>
+          </a:prstGeom>
+          <a:noFill/>
+        </p:spPr>
+        <p:txBody>
+          <a:bodyPr wrap="square" lIns="0" rIns="0" tIns="0" bIns="0">
+            <a:spAutoFit/>
+          </a:bodyPr>
+          <a:lstStyle/>
+          <a:p>
+            <a:pPr algn="l">
+              <a:lnSpc>
+                <a:spcPct val="120000"/>
+              </a:lnSpc>
+              <a:spcAft>
+                <a:spcPts val="0"/>
+              </a:spcAft>
+            </a:pPr>
+            <a:r>
+              <a:rPr sz="1600" b="1">
+                <a:solidFill>
+                  <a:srgbClr val="1B1B1E"/>
+                </a:solidFill>
+                <a:latin typeface="Consolas"/>
+              </a:rPr>
+              <a:t>Real gaps go unnoticed.</a:t>
+            </a:r>
+          </a:p>
+        </p:txBody>
+      </p:sp>
+      <p:sp>
+        <p:nvSpPr>
+          <p:cNvPr id="12" name="TextBox 11"/>
+          <p:cNvSpPr txBox="1"/>
+          <p:nvPr/>
+        </p:nvSpPr>
+        <p:spPr>
+          <a:xfrm>
+            <a:off x="1371600" y="5568696"/>
+            <a:ext cx="6903720" cy="548640"/>
+          </a:xfrm>
+          <a:prstGeom prst="rect">
+            <a:avLst/>
+          </a:prstGeom>
+          <a:noFill/>
+        </p:spPr>
+        <p:txBody>
+          <a:bodyPr wrap="square" lIns="0" rIns="0" tIns="0" bIns="0">
+            <a:spAutoFit/>
+          </a:bodyPr>
+          <a:lstStyle/>
+          <a:p>
+            <a:pPr algn="l">
+              <a:lnSpc>
+                <a:spcPct val="120000"/>
+              </a:lnSpc>
+              <a:spcAft>
+                <a:spcPts val="0"/>
+              </a:spcAft>
+            </a:pPr>
+            <a:r>
+              <a:rPr sz="1600" b="0">
+                <a:solidFill>
+                  <a:srgbClr val="6B6B73"/>
+                </a:solidFill>
+                <a:latin typeface="Consolas"/>
+              </a:rPr>
+              <a:t>A green run says little about coverage.</a:t>
+            </a:r>
+          </a:p>
+        </p:txBody>
+      </p:sp>
+      <p:sp>
+        <p:nvSpPr>
+          <p:cNvPr id="13" name="Rectangle 12"/>
+          <p:cNvSpPr/>
+          <p:nvPr/>
+        </p:nvSpPr>
+        <p:spPr>
+          <a:xfrm>
+            <a:off x="868680" y="6419088"/>
+            <a:ext cx="201168" cy="114300"/>
+          </a:xfrm>
+          <a:prstGeom prst="rect">
+            <a:avLst/>
+          </a:prstGeom>
+          <a:solidFill>
+            <a:srgbClr val="C2410C"/>
+          </a:solidFill>
+          <a:ln>
+            <a:noFill/>
+          </a:ln>
+          <a:effectLst/>
+        </p:spPr>
+        <p:style>
+          <a:lnRef idx="1">
+            <a:schemeClr val="accent1"/>
+          </a:lnRef>
+          <a:fillRef idx="3">
+            <a:schemeClr val="accent1"/>
+          </a:fillRef>
+          <a:effectRef idx="2">
+            <a:schemeClr val="accent1"/>
+          </a:effectRef>
+          <a:fontRef idx="minor">
+            <a:schemeClr val="lt1"/>
+          </a:fontRef>
+        </p:style>
+        <p:txBody>
+          <a:bodyPr rtlCol="0" anchor="ctr"/>
+          <a:lstStyle/>
+          <a:p>
+            <a:pPr algn="ctr"/>
+          </a:p>
+        </p:txBody>
+      </p:sp>
+      <p:sp>
+        <p:nvSpPr>
+          <p:cNvPr id="14" name="TextBox 13"/>
+          <p:cNvSpPr txBox="1"/>
+          <p:nvPr/>
+        </p:nvSpPr>
+        <p:spPr>
+          <a:xfrm>
+            <a:off x="1371600" y="6309360"/>
+            <a:ext cx="6903720" cy="914400"/>
+          </a:xfrm>
+          <a:prstGeom prst="rect">
+            <a:avLst/>
+          </a:prstGeom>
+          <a:noFill/>
+        </p:spPr>
+        <p:txBody>
+          <a:bodyPr wrap="square" lIns="0" rIns="0" tIns="0" bIns="0">
+            <a:spAutoFit/>
+          </a:bodyPr>
+          <a:lstStyle/>
+          <a:p>
+            <a:pPr algn="l">
+              <a:lnSpc>
+                <a:spcPct val="120000"/>
+              </a:lnSpc>
+              <a:spcAft>
+                <a:spcPts val="0"/>
+              </a:spcAft>
+            </a:pPr>
+            <a:r>
+              <a:rPr sz="1600" b="1">
+                <a:solidFill>
+                  <a:srgbClr val="1B1B1E"/>
+                </a:solidFill>
+                <a:latin typeface="Consolas"/>
+              </a:rPr>
+              <a:t>Slow feedback.</a:t>
+            </a:r>
+          </a:p>
+        </p:txBody>
+      </p:sp>
+      <p:sp>
+        <p:nvSpPr>
+          <p:cNvPr id="15" name="TextBox 14"/>
+          <p:cNvSpPr txBox="1"/>
+          <p:nvPr/>
+        </p:nvSpPr>
+        <p:spPr>
+          <a:xfrm>
+            <a:off x="1371600" y="6620256"/>
+            <a:ext cx="6903720" cy="548640"/>
+          </a:xfrm>
+          <a:prstGeom prst="rect">
+            <a:avLst/>
+          </a:prstGeom>
+          <a:noFill/>
+        </p:spPr>
+        <p:txBody>
+          <a:bodyPr wrap="square" lIns="0" rIns="0" tIns="0" bIns="0">
+            <a:spAutoFit/>
+          </a:bodyPr>
+          <a:lstStyle/>
+          <a:p>
+            <a:pPr algn="l">
+              <a:lnSpc>
+                <a:spcPct val="120000"/>
+              </a:lnSpc>
+              <a:spcAft>
+                <a:spcPts val="0"/>
+              </a:spcAft>
+            </a:pPr>
+            <a:r>
+              <a:rPr sz="1600" b="0">
+                <a:solidFill>
+                  <a:srgbClr val="6B6B73"/>
+                </a:solidFill>
+                <a:latin typeface="Consolas"/>
+              </a:rPr>
+              <a:t>Everything runs because nothing is mapped.</a:t>
+            </a:r>
+          </a:p>
+        </p:txBody>
+      </p:sp>
+    </p:spTree>
+  </p:cSld>
+  <p:clrMapOvr>
+    <a:masterClrMapping/>
+  </p:clrMapOvr>
+</p:sld>
+</file>
+
+<file path=ppt/slides/slide3.xml><?xml version="1.0" encoding="utf-8"?>
+<p:sld xmlns:a="http://schemas.openxmlformats.org/drawingml/2006/main" xmlns:p="http://schemas.openxmlformats.org/presentationml/2006/main" xmlns:r="http://schemas.openxmlformats.org/officeDocument/2006/relationships">
+  <p:cSld>
+    <p:spTree>
+      <p:nvGrpSpPr>
+        <p:cNvPr id="1" name=""/>
+        <p:cNvGrpSpPr/>
+        <p:nvPr/>
+      </p:nvGrpSpPr>
+      <p:grpSpPr/>
+      <p:sp>
+        <p:nvSpPr>
+          <p:cNvPr id="2" name="Rectangle 1"/>
+          <p:cNvSpPr/>
+          <p:nvPr/>
+        </p:nvSpPr>
+        <p:spPr>
+          <a:xfrm>
+            <a:off x="0" y="0"/>
+            <a:ext cx="9144000" cy="9144000"/>
+          </a:xfrm>
+          <a:prstGeom prst="rect">
+            <a:avLst/>
+          </a:prstGeom>
+          <a:solidFill>
+            <a:srgbClr val="F6F5F2"/>
+          </a:solidFill>
+          <a:ln>
+            <a:noFill/>
+          </a:ln>
+          <a:effectLst/>
+        </p:spPr>
+        <p:style>
+          <a:lnRef idx="1">
+            <a:schemeClr val="accent1"/>
+          </a:lnRef>
+          <a:fillRef idx="3">
+            <a:schemeClr val="accent1"/>
+          </a:fillRef>
+          <a:effectRef idx="2">
+            <a:schemeClr val="accent1"/>
+          </a:effectRef>
+          <a:fontRef idx="minor">
+            <a:schemeClr val="lt1"/>
+          </a:fontRef>
+        </p:style>
+        <p:txBody>
+          <a:bodyPr rtlCol="0" anchor="ctr"/>
+          <a:lstStyle/>
+          <a:p>
+            <a:pPr algn="ctr"/>
+          </a:p>
+        </p:txBody>
+      </p:sp>
+      <p:sp>
+        <p:nvSpPr>
+          <p:cNvPr id="3" name="TextBox 2"/>
+          <p:cNvSpPr txBox="1"/>
+          <p:nvPr/>
+        </p:nvSpPr>
+        <p:spPr>
+          <a:xfrm>
+            <a:off x="868680" y="914400"/>
+            <a:ext cx="7406640" cy="1280160"/>
+          </a:xfrm>
+          <a:prstGeom prst="rect">
+            <a:avLst/>
+          </a:prstGeom>
+          <a:noFill/>
+        </p:spPr>
+        <p:txBody>
+          <a:bodyPr wrap="square" lIns="0" rIns="0" tIns="0" bIns="0">
+            <a:spAutoFit/>
+          </a:bodyPr>
           <a:lstStyle/>
           <a:p>
             <a:pPr algn="ctr">
+              <a:lnSpc>
+                <a:spcPct val="110000"/>
+              </a:lnSpc>
+              <a:spcAft>
+                <a:spcPts val="0"/>
+              </a:spcAft>
+            </a:pPr>
+            <a:r>
+              <a:rPr sz="3000" b="1">
+                <a:solidFill>
+                  <a:srgbClr val="1B1B1E"/>
+                </a:solidFill>
+                <a:latin typeface="Consolas"/>
+              </a:rPr>
+              <a:t>Watch one run. Draw the real map.</a:t>
+            </a:r>
+          </a:p>
+        </p:txBody>
+      </p:sp>
+      <p:sp>
+        <p:nvSpPr>
+          <p:cNvPr id="4" name="Rectangle 3"/>
+          <p:cNvSpPr/>
+          <p:nvPr/>
+        </p:nvSpPr>
+        <p:spPr>
+          <a:xfrm>
+            <a:off x="3840480" y="1874519"/>
+            <a:ext cx="1463040" cy="44450"/>
+          </a:xfrm>
+          <a:prstGeom prst="rect">
+            <a:avLst/>
+          </a:prstGeom>
+          <a:solidFill>
+            <a:srgbClr val="C2410C"/>
+          </a:solidFill>
+          <a:ln>
+            <a:noFill/>
+          </a:ln>
+          <a:effectLst/>
+        </p:spPr>
+        <p:style>
+          <a:lnRef idx="1">
+            <a:schemeClr val="accent1"/>
+          </a:lnRef>
+          <a:fillRef idx="3">
+            <a:schemeClr val="accent1"/>
+          </a:fillRef>
+          <a:effectRef idx="2">
+            <a:schemeClr val="accent1"/>
+          </a:effectRef>
+          <a:fontRef idx="minor">
+            <a:schemeClr val="lt1"/>
+          </a:fontRef>
+        </p:style>
+        <p:txBody>
+          <a:bodyPr rtlCol="0" anchor="ctr"/>
+          <a:lstStyle/>
+          <a:p>
+            <a:pPr algn="ctr"/>
+          </a:p>
+        </p:txBody>
+      </p:sp>
+      <p:sp>
+        <p:nvSpPr>
+          <p:cNvPr id="5" name="TextBox 4"/>
+          <p:cNvSpPr txBox="1"/>
+          <p:nvPr/>
+        </p:nvSpPr>
+        <p:spPr>
+          <a:xfrm>
+            <a:off x="868680" y="8366760"/>
+            <a:ext cx="7406640" cy="365760"/>
+          </a:xfrm>
+          <a:prstGeom prst="rect">
+            <a:avLst/>
+          </a:prstGeom>
+          <a:noFill/>
+        </p:spPr>
+        <p:txBody>
+          <a:bodyPr wrap="square" lIns="0" rIns="0" tIns="0" bIns="0">
+            <a:spAutoFit/>
+          </a:bodyPr>
+          <a:lstStyle/>
+          <a:p>
+            <a:pPr algn="l"/>
+            <a:r>
+              <a:rPr sz="1050">
+                <a:solidFill>
+                  <a:srgbClr val="6B6B73"/>
+                </a:solidFill>
+                <a:latin typeface="Consolas"/>
+              </a:rPr>
+              <a:t>the idea</a:t>
+            </a:r>
+            <a:r>
+              <a:rPr sz="1050">
+                <a:solidFill>
+                  <a:srgbClr val="6B6B73"/>
+                </a:solidFill>
+                <a:latin typeface="Consolas"/>
+              </a:rPr>
+              <a:t>   ·   </a:t>
+            </a:r>
+            <a:r>
+              <a:rPr sz="1050">
+                <a:solidFill>
+                  <a:srgbClr val="C2410C"/>
+                </a:solidFill>
+                <a:latin typeface="Consolas"/>
+              </a:rPr>
+              <a:t>03</a:t>
+            </a:r>
+          </a:p>
+        </p:txBody>
+      </p:sp>
+      <p:sp>
+        <p:nvSpPr>
+          <p:cNvPr id="6" name="TextBox 5"/>
+          <p:cNvSpPr txBox="1"/>
+          <p:nvPr/>
+        </p:nvSpPr>
+        <p:spPr>
+          <a:xfrm>
+            <a:off x="868680" y="2926080"/>
+            <a:ext cx="7406640" cy="2011680"/>
+          </a:xfrm>
+          <a:prstGeom prst="rect">
+            <a:avLst/>
+          </a:prstGeom>
+          <a:noFill/>
+        </p:spPr>
+        <p:txBody>
+          <a:bodyPr wrap="square" lIns="0" rIns="0" tIns="0" bIns="0">
+            <a:spAutoFit/>
+          </a:bodyPr>
+          <a:lstStyle/>
+          <a:p>
+            <a:pPr algn="l">
+              <a:lnSpc>
+                <a:spcPct val="135000"/>
+              </a:lnSpc>
+              <a:spcAft>
+                <a:spcPts val="0"/>
+              </a:spcAft>
+            </a:pPr>
+            <a:r>
+              <a:rPr sz="2000" b="0">
+                <a:solidFill>
+                  <a:srgbClr val="1B1B1E"/>
+                </a:solidFill>
+                <a:latin typeface="Consolas"/>
+              </a:rPr>
+              <a:t>Marrow instruments a single test run and</a:t>
+            </a:r>
+          </a:p>
+          <a:p>
+            <a:pPr algn="l">
+              <a:lnSpc>
+                <a:spcPct val="135000"/>
+              </a:lnSpc>
+              <a:spcAft>
+                <a:spcPts val="0"/>
+              </a:spcAft>
+            </a:pPr>
+            <a:r>
+              <a:rPr sz="2000" b="0">
+                <a:solidFill>
+                  <a:srgbClr val="1B1B1E"/>
+                </a:solidFill>
+                <a:latin typeface="Consolas"/>
+              </a:rPr>
+              <a:t>produces a test → code coverage map.</a:t>
+            </a:r>
+          </a:p>
+        </p:txBody>
+      </p:sp>
+      <p:sp>
+        <p:nvSpPr>
+          <p:cNvPr id="7" name="Rounded Rectangle 6"/>
+          <p:cNvSpPr/>
+          <p:nvPr/>
+        </p:nvSpPr>
+        <p:spPr>
+          <a:xfrm>
+            <a:off x="868680" y="4754880"/>
+            <a:ext cx="7406640" cy="1920240"/>
+          </a:xfrm>
+          <a:prstGeom prst="roundRect">
+            <a:avLst>
+              <a:gd name="adj" fmla="val 8000"/>
+            </a:avLst>
+          </a:prstGeom>
+          <a:solidFill>
+            <a:srgbClr val="1B1B1E"/>
+          </a:solidFill>
+          <a:ln>
+            <a:noFill/>
+          </a:ln>
+          <a:effectLst/>
+        </p:spPr>
+        <p:style>
+          <a:lnRef idx="1">
+            <a:schemeClr val="accent1"/>
+          </a:lnRef>
+          <a:fillRef idx="3">
+            <a:schemeClr val="accent1"/>
+          </a:fillRef>
+          <a:effectRef idx="2">
+            <a:schemeClr val="accent1"/>
+          </a:effectRef>
+          <a:fontRef idx="minor">
+            <a:schemeClr val="lt1"/>
+          </a:fontRef>
+        </p:style>
+        <p:txBody>
+          <a:bodyPr rtlCol="0" anchor="ctr" wrap="square" lIns="457200" rIns="457200"/>
+          <a:lstStyle/>
+          <a:p>
+            <a:pPr algn="ctr">
+              <a:lnSpc>
+                <a:spcPct val="145000"/>
+              </a:lnSpc>
+              <a:spcAft>
+                <a:spcPts val="0"/>
+              </a:spcAft>
+            </a:pPr>
+            <a:r>
+              <a:rPr sz="2000" b="0">
+                <a:solidFill>
+                  <a:srgbClr val="F6F5F2"/>
+                </a:solidFill>
+                <a:latin typeface="Consolas"/>
+              </a:rPr>
+              <a:t>no annotations</a:t>
+            </a:r>
+          </a:p>
+          <a:p>
+            <a:pPr algn="ctr">
+              <a:lnSpc>
+                <a:spcPct val="145000"/>
+              </a:lnSpc>
+              <a:spcAft>
+                <a:spcPts val="0"/>
+              </a:spcAft>
+            </a:pPr>
+            <a:r>
+              <a:rPr sz="2000" b="0">
+                <a:solidFill>
+                  <a:srgbClr val="F6F5F2"/>
+                </a:solidFill>
+                <a:latin typeface="Consolas"/>
+              </a:rPr>
+              <a:t>no config</a:t>
+            </a:r>
+          </a:p>
+          <a:p>
+            <a:pPr algn="ctr">
+              <a:lnSpc>
+                <a:spcPct val="145000"/>
+              </a:lnSpc>
+              <a:spcAft>
+                <a:spcPts val="0"/>
+              </a:spcAft>
+            </a:pPr>
+            <a:r>
+              <a:rPr sz="2000" b="1">
+                <a:solidFill>
+                  <a:srgbClr val="C2410C"/>
+                </a:solidFill>
+                <a:latin typeface="Consolas"/>
+              </a:rPr>
+              <a:t>one run, the whole map</a:t>
+            </a:r>
+          </a:p>
+        </p:txBody>
+      </p:sp>
+      <p:sp>
+        <p:nvSpPr>
+          <p:cNvPr id="8" name="TextBox 7"/>
+          <p:cNvSpPr txBox="1"/>
+          <p:nvPr/>
+        </p:nvSpPr>
+        <p:spPr>
+          <a:xfrm>
+            <a:off x="868680" y="7132320"/>
+            <a:ext cx="7406640" cy="548640"/>
+          </a:xfrm>
+          <a:prstGeom prst="rect">
+            <a:avLst/>
+          </a:prstGeom>
+          <a:noFill/>
+        </p:spPr>
+        <p:txBody>
+          <a:bodyPr wrap="square" lIns="0" rIns="0" tIns="0" bIns="0">
+            <a:spAutoFit/>
+          </a:bodyPr>
+          <a:lstStyle/>
+          <a:p>
+            <a:pPr algn="ctr">
+              <a:lnSpc>
+                <a:spcPct val="125000"/>
+              </a:lnSpc>
+              <a:spcAft>
+                <a:spcPts val="0"/>
+              </a:spcAft>
+            </a:pPr>
+            <a:r>
+              <a:rPr sz="1600" b="0">
+                <a:solidFill>
+                  <a:srgbClr val="6B6B73"/>
+                </a:solidFill>
+                <a:latin typeface="Consolas"/>
+              </a:rPr>
+              <a:t>Point it at the test command you already use.</a:t>
+            </a:r>
+          </a:p>
+        </p:txBody>
+      </p:sp>
+    </p:spTree>
+  </p:cSld>
+  <p:clrMapOvr>
+    <a:masterClrMapping/>
+  </p:clrMapOvr>
+</p:sld>
+</file>
+
+<file path=ppt/slides/slide4.xml><?xml version="1.0" encoding="utf-8"?>
+<p:sld xmlns:a="http://schemas.openxmlformats.org/drawingml/2006/main" xmlns:p="http://schemas.openxmlformats.org/presentationml/2006/main" xmlns:r="http://schemas.openxmlformats.org/officeDocument/2006/relationships">
+  <p:cSld>
+    <p:spTree>
+      <p:nvGrpSpPr>
+        <p:cNvPr id="1" name=""/>
+        <p:cNvGrpSpPr/>
+        <p:nvPr/>
+      </p:nvGrpSpPr>
+      <p:grpSpPr/>
+      <p:sp>
+        <p:nvSpPr>
+          <p:cNvPr id="2" name="Rectangle 1"/>
+          <p:cNvSpPr/>
+          <p:nvPr/>
+        </p:nvSpPr>
+        <p:spPr>
+          <a:xfrm>
+            <a:off x="0" y="0"/>
+            <a:ext cx="9144000" cy="9144000"/>
+          </a:xfrm>
+          <a:prstGeom prst="rect">
+            <a:avLst/>
+          </a:prstGeom>
+          <a:solidFill>
+            <a:srgbClr val="F6F5F2"/>
+          </a:solidFill>
+          <a:ln>
+            <a:noFill/>
+          </a:ln>
+          <a:effectLst/>
+        </p:spPr>
+        <p:style>
+          <a:lnRef idx="1">
+            <a:schemeClr val="accent1"/>
+          </a:lnRef>
+          <a:fillRef idx="3">
+            <a:schemeClr val="accent1"/>
+          </a:fillRef>
+          <a:effectRef idx="2">
+            <a:schemeClr val="accent1"/>
+          </a:effectRef>
+          <a:fontRef idx="minor">
+            <a:schemeClr val="lt1"/>
+          </a:fontRef>
+        </p:style>
+        <p:txBody>
+          <a:bodyPr rtlCol="0" anchor="ctr"/>
+          <a:lstStyle/>
+          <a:p>
+            <a:pPr algn="ctr"/>
+          </a:p>
+        </p:txBody>
+      </p:sp>
+      <p:sp>
+        <p:nvSpPr>
+          <p:cNvPr id="3" name="TextBox 2"/>
+          <p:cNvSpPr txBox="1"/>
+          <p:nvPr/>
+        </p:nvSpPr>
+        <p:spPr>
+          <a:xfrm>
+            <a:off x="868680" y="914400"/>
+            <a:ext cx="7406640" cy="1280160"/>
+          </a:xfrm>
+          <a:prstGeom prst="rect">
+            <a:avLst/>
+          </a:prstGeom>
+          <a:noFill/>
+        </p:spPr>
+        <p:txBody>
+          <a:bodyPr wrap="square" lIns="0" rIns="0" tIns="0" bIns="0">
+            <a:spAutoFit/>
+          </a:bodyPr>
+          <a:lstStyle/>
+          <a:p>
+            <a:pPr algn="ctr">
+              <a:lnSpc>
+                <a:spcPct val="110000"/>
+              </a:lnSpc>
+              <a:spcAft>
+                <a:spcPts val="0"/>
+              </a:spcAft>
+            </a:pPr>
+            <a:r>
+              <a:rPr sz="3000" b="1">
+                <a:solidFill>
+                  <a:srgbClr val="1B1B1E"/>
+                </a:solidFill>
+                <a:latin typeface="Consolas"/>
+              </a:rPr>
+              <a:t>How it works</a:t>
+            </a:r>
+          </a:p>
+        </p:txBody>
+      </p:sp>
+      <p:sp>
+        <p:nvSpPr>
+          <p:cNvPr id="4" name="Rectangle 3"/>
+          <p:cNvSpPr/>
+          <p:nvPr/>
+        </p:nvSpPr>
+        <p:spPr>
+          <a:xfrm>
+            <a:off x="3840480" y="1874519"/>
+            <a:ext cx="1463040" cy="44450"/>
+          </a:xfrm>
+          <a:prstGeom prst="rect">
+            <a:avLst/>
+          </a:prstGeom>
+          <a:solidFill>
+            <a:srgbClr val="C2410C"/>
+          </a:solidFill>
+          <a:ln>
+            <a:noFill/>
+          </a:ln>
+          <a:effectLst/>
+        </p:spPr>
+        <p:style>
+          <a:lnRef idx="1">
+            <a:schemeClr val="accent1"/>
+          </a:lnRef>
+          <a:fillRef idx="3">
+            <a:schemeClr val="accent1"/>
+          </a:fillRef>
+          <a:effectRef idx="2">
+            <a:schemeClr val="accent1"/>
+          </a:effectRef>
+          <a:fontRef idx="minor">
+            <a:schemeClr val="lt1"/>
+          </a:fontRef>
+        </p:style>
+        <p:txBody>
+          <a:bodyPr rtlCol="0" anchor="ctr"/>
+          <a:lstStyle/>
+          <a:p>
+            <a:pPr algn="ctr"/>
+          </a:p>
+        </p:txBody>
+      </p:sp>
+      <p:sp>
+        <p:nvSpPr>
+          <p:cNvPr id="5" name="TextBox 4"/>
+          <p:cNvSpPr txBox="1"/>
+          <p:nvPr/>
+        </p:nvSpPr>
+        <p:spPr>
+          <a:xfrm>
+            <a:off x="868680" y="8366760"/>
+            <a:ext cx="7406640" cy="365760"/>
+          </a:xfrm>
+          <a:prstGeom prst="rect">
+            <a:avLst/>
+          </a:prstGeom>
+          <a:noFill/>
+        </p:spPr>
+        <p:txBody>
+          <a:bodyPr wrap="square" lIns="0" rIns="0" tIns="0" bIns="0">
+            <a:spAutoFit/>
+          </a:bodyPr>
+          <a:lstStyle/>
+          <a:p>
+            <a:pPr algn="l"/>
+            <a:r>
+              <a:rPr sz="1050">
+                <a:solidFill>
+                  <a:srgbClr val="6B6B73"/>
+                </a:solidFill>
+                <a:latin typeface="Consolas"/>
+              </a:rPr>
+              <a:t>how it works</a:t>
+            </a:r>
+            <a:r>
+              <a:rPr sz="1050">
+                <a:solidFill>
+                  <a:srgbClr val="6B6B73"/>
+                </a:solidFill>
+                <a:latin typeface="Consolas"/>
+              </a:rPr>
+              <a:t>   ·   </a:t>
+            </a:r>
+            <a:r>
+              <a:rPr sz="1050">
+                <a:solidFill>
+                  <a:srgbClr val="C2410C"/>
+                </a:solidFill>
+                <a:latin typeface="Consolas"/>
+              </a:rPr>
+              <a:t>04</a:t>
+            </a:r>
+          </a:p>
+        </p:txBody>
+      </p:sp>
+      <p:sp>
+        <p:nvSpPr>
+          <p:cNvPr id="6" name="TextBox 5"/>
+          <p:cNvSpPr txBox="1"/>
+          <p:nvPr/>
+        </p:nvSpPr>
+        <p:spPr>
+          <a:xfrm>
+            <a:off x="868680" y="2926080"/>
+            <a:ext cx="914400" cy="731520"/>
+          </a:xfrm>
+          <a:prstGeom prst="rect">
+            <a:avLst/>
+          </a:prstGeom>
+          <a:noFill/>
+        </p:spPr>
+        <p:txBody>
+          <a:bodyPr wrap="square" lIns="0" rIns="0" tIns="0" bIns="0">
+            <a:spAutoFit/>
+          </a:bodyPr>
+          <a:lstStyle/>
+          <a:p>
+            <a:pPr algn="l">
+              <a:lnSpc>
+                <a:spcPct val="100000"/>
+              </a:lnSpc>
+              <a:spcAft>
+                <a:spcPts val="0"/>
+              </a:spcAft>
+            </a:pPr>
+            <a:r>
+              <a:rPr sz="3000" b="1">
+                <a:solidFill>
+                  <a:srgbClr val="C2410C"/>
+                </a:solidFill>
+                <a:latin typeface="Consolas"/>
+              </a:rPr>
+              <a:t>01</a:t>
+            </a:r>
+          </a:p>
+        </p:txBody>
+      </p:sp>
+      <p:sp>
+        <p:nvSpPr>
+          <p:cNvPr id="7" name="TextBox 6"/>
+          <p:cNvSpPr txBox="1"/>
+          <p:nvPr/>
+        </p:nvSpPr>
+        <p:spPr>
+          <a:xfrm>
+            <a:off x="1874520" y="2971800"/>
+            <a:ext cx="6400800" cy="457200"/>
+          </a:xfrm>
+          <a:prstGeom prst="rect">
+            <a:avLst/>
+          </a:prstGeom>
+          <a:noFill/>
+        </p:spPr>
+        <p:txBody>
+          <a:bodyPr wrap="square" lIns="0" rIns="0" tIns="0" bIns="0">
+            <a:spAutoFit/>
+          </a:bodyPr>
+          <a:lstStyle/>
+          <a:p>
+            <a:pPr algn="l">
               <a:lnSpc>
                 <a:spcPct val="115000"/>
               </a:lnSpc>
@@ -4321,27 +4672,91 @@
               </a:spcAft>
             </a:pPr>
             <a:r>
-              <a:rPr sz="2800" b="1">
-                <a:solidFill>
-                  <a:srgbClr val="1E1E1E"/>
+              <a:rPr sz="2000" b="1">
+                <a:solidFill>
+                  <a:srgbClr val="1B1B1E"/>
                 </a:solidFill>
                 <a:latin typeface="Consolas"/>
               </a:rPr>
-              <a:t>pipx install marrow</a:t>
-            </a:r>
-          </a:p>
-        </p:txBody>
-      </p:sp>
-      <p:sp>
-        <p:nvSpPr>
-          <p:cNvPr id="5" name="TextBox 4"/>
+              <a:t>Run it</a:t>
+            </a:r>
+          </a:p>
+        </p:txBody>
+      </p:sp>
+      <p:sp>
+        <p:nvSpPr>
+          <p:cNvPr id="8" name="Rounded Rectangle 7"/>
+          <p:cNvSpPr/>
+          <p:nvPr/>
+        </p:nvSpPr>
+        <p:spPr>
+          <a:xfrm>
+            <a:off x="1874520" y="3474720"/>
+            <a:ext cx="6400800" cy="566928"/>
+          </a:xfrm>
+          <a:prstGeom prst="roundRect">
+            <a:avLst>
+              <a:gd name="adj" fmla="val 8000"/>
+            </a:avLst>
+          </a:prstGeom>
+          <a:solidFill>
+            <a:srgbClr val="1B1B1E"/>
+          </a:solidFill>
+          <a:ln>
+            <a:noFill/>
+          </a:ln>
+          <a:effectLst/>
+        </p:spPr>
+        <p:style>
+          <a:lnRef idx="1">
+            <a:schemeClr val="accent1"/>
+          </a:lnRef>
+          <a:fillRef idx="3">
+            <a:schemeClr val="accent1"/>
+          </a:fillRef>
+          <a:effectRef idx="2">
+            <a:schemeClr val="accent1"/>
+          </a:effectRef>
+          <a:fontRef idx="minor">
+            <a:schemeClr val="lt1"/>
+          </a:fontRef>
+        </p:style>
+        <p:txBody>
+          <a:bodyPr rtlCol="0" anchor="ctr" wrap="square" lIns="274320"/>
+          <a:lstStyle/>
+          <a:p>
+            <a:pPr algn="ctr"/>
+            <a:r>
+              <a:rPr sz="1500">
+                <a:solidFill>
+                  <a:srgbClr val="C2410C"/>
+                </a:solidFill>
+                <a:latin typeface="Consolas"/>
+              </a:rPr>
+              <a:t>$ </a:t>
+            </a:r>
+            <a:r>
+              <a:rPr sz="1500">
+                <a:solidFill>
+                  <a:srgbClr val="F6F5F2"/>
+                </a:solidFill>
+                <a:latin typeface="Consolas"/>
+              </a:rPr>
+              <a:t>marrow watch -- &lt;your test cmd&gt;</a:t>
+            </a:r>
+          </a:p>
+        </p:txBody>
+      </p:sp>
+      <p:sp>
+        <p:nvSpPr>
+          <p:cNvPr id="9" name="TextBox 8"/>
           <p:cNvSpPr txBox="1"/>
           <p:nvPr/>
         </p:nvSpPr>
         <p:spPr>
           <a:xfrm>
-            <a:off x="822960" y="6309360"/>
-            <a:ext cx="7498080" cy="640080"/>
+            <a:off x="868680" y="4572000"/>
+            <a:ext cx="914400" cy="731520"/>
           </a:xfrm>
           <a:prstGeom prst="rect">
             <a:avLst/>
@@ -4354,7 +4769,49 @@
           </a:bodyPr>
           <a:lstStyle/>
           <a:p>
-            <a:pPr algn="ctr">
+            <a:pPr algn="l">
+              <a:lnSpc>
+                <a:spcPct val="100000"/>
+              </a:lnSpc>
+              <a:spcAft>
+                <a:spcPts val="0"/>
+              </a:spcAft>
+            </a:pPr>
+            <a:r>
+              <a:rPr sz="3000" b="1">
+                <a:solidFill>
+                  <a:srgbClr val="C2410C"/>
+                </a:solidFill>
+                <a:latin typeface="Consolas"/>
+              </a:rPr>
+              <a:t>02</a:t>
+            </a:r>
+          </a:p>
+        </p:txBody>
+      </p:sp>
+      <p:sp>
+        <p:nvSpPr>
+          <p:cNvPr id="10" name="TextBox 9"/>
+          <p:cNvSpPr txBox="1"/>
+          <p:nvPr/>
+        </p:nvSpPr>
+        <p:spPr>
+          <a:xfrm>
+            <a:off x="1874520" y="4617720"/>
+            <a:ext cx="6400800" cy="457200"/>
+          </a:xfrm>
+          <a:prstGeom prst="rect">
+            <a:avLst/>
+          </a:prstGeom>
+          <a:noFill/>
+        </p:spPr>
+        <p:txBody>
+          <a:bodyPr wrap="square" lIns="0" rIns="0" tIns="0" bIns="0">
+            <a:spAutoFit/>
+          </a:bodyPr>
+          <a:lstStyle/>
+          <a:p>
+            <a:pPr algn="l">
               <a:lnSpc>
                 <a:spcPct val="115000"/>
               </a:lnSpc>
@@ -4363,13 +4820,618 @@
               </a:spcAft>
             </a:pPr>
             <a:r>
+              <a:rPr sz="2000" b="1">
+                <a:solidFill>
+                  <a:srgbClr val="1B1B1E"/>
+                </a:solidFill>
+                <a:latin typeface="Consolas"/>
+              </a:rPr>
+              <a:t>It records</a:t>
+            </a:r>
+          </a:p>
+        </p:txBody>
+      </p:sp>
+      <p:sp>
+        <p:nvSpPr>
+          <p:cNvPr id="11" name="TextBox 10"/>
+          <p:cNvSpPr txBox="1"/>
+          <p:nvPr/>
+        </p:nvSpPr>
+        <p:spPr>
+          <a:xfrm>
+            <a:off x="1874520" y="5138928"/>
+            <a:ext cx="6400800" cy="731520"/>
+          </a:xfrm>
+          <a:prstGeom prst="rect">
+            <a:avLst/>
+          </a:prstGeom>
+          <a:noFill/>
+        </p:spPr>
+        <p:txBody>
+          <a:bodyPr wrap="square" lIns="0" rIns="0" tIns="0" bIns="0">
+            <a:spAutoFit/>
+          </a:bodyPr>
+          <a:lstStyle/>
+          <a:p>
+            <a:pPr algn="l">
+              <a:lnSpc>
+                <a:spcPct val="130000"/>
+              </a:lnSpc>
+              <a:spcAft>
+                <a:spcPts val="0"/>
+              </a:spcAft>
+            </a:pPr>
+            <a:r>
+              <a:rPr sz="1600" b="0">
+                <a:solidFill>
+                  <a:srgbClr val="6B6B73"/>
+                </a:solidFill>
+                <a:latin typeface="Consolas"/>
+              </a:rPr>
+              <a:t>which lines each test exercised</a:t>
+            </a:r>
+          </a:p>
+        </p:txBody>
+      </p:sp>
+      <p:sp>
+        <p:nvSpPr>
+          <p:cNvPr id="12" name="TextBox 11"/>
+          <p:cNvSpPr txBox="1"/>
+          <p:nvPr/>
+        </p:nvSpPr>
+        <p:spPr>
+          <a:xfrm>
+            <a:off x="868680" y="6217920"/>
+            <a:ext cx="914400" cy="731520"/>
+          </a:xfrm>
+          <a:prstGeom prst="rect">
+            <a:avLst/>
+          </a:prstGeom>
+          <a:noFill/>
+        </p:spPr>
+        <p:txBody>
+          <a:bodyPr wrap="square" lIns="0" rIns="0" tIns="0" bIns="0">
+            <a:spAutoFit/>
+          </a:bodyPr>
+          <a:lstStyle/>
+          <a:p>
+            <a:pPr algn="l">
+              <a:lnSpc>
+                <a:spcPct val="100000"/>
+              </a:lnSpc>
+              <a:spcAft>
+                <a:spcPts val="0"/>
+              </a:spcAft>
+            </a:pPr>
+            <a:r>
+              <a:rPr sz="3000" b="1">
+                <a:solidFill>
+                  <a:srgbClr val="C2410C"/>
+                </a:solidFill>
+                <a:latin typeface="Consolas"/>
+              </a:rPr>
+              <a:t>03</a:t>
+            </a:r>
+          </a:p>
+        </p:txBody>
+      </p:sp>
+      <p:sp>
+        <p:nvSpPr>
+          <p:cNvPr id="13" name="TextBox 12"/>
+          <p:cNvSpPr txBox="1"/>
+          <p:nvPr/>
+        </p:nvSpPr>
+        <p:spPr>
+          <a:xfrm>
+            <a:off x="1874520" y="6263640"/>
+            <a:ext cx="6400800" cy="457200"/>
+          </a:xfrm>
+          <a:prstGeom prst="rect">
+            <a:avLst/>
+          </a:prstGeom>
+          <a:noFill/>
+        </p:spPr>
+        <p:txBody>
+          <a:bodyPr wrap="square" lIns="0" rIns="0" tIns="0" bIns="0">
+            <a:spAutoFit/>
+          </a:bodyPr>
+          <a:lstStyle/>
+          <a:p>
+            <a:pPr algn="l">
+              <a:lnSpc>
+                <a:spcPct val="115000"/>
+              </a:lnSpc>
+              <a:spcAft>
+                <a:spcPts val="0"/>
+              </a:spcAft>
+            </a:pPr>
+            <a:r>
+              <a:rPr sz="2000" b="1">
+                <a:solidFill>
+                  <a:srgbClr val="1B1B1E"/>
+                </a:solidFill>
+                <a:latin typeface="Consolas"/>
+              </a:rPr>
+              <a:t>It emits</a:t>
+            </a:r>
+          </a:p>
+        </p:txBody>
+      </p:sp>
+      <p:sp>
+        <p:nvSpPr>
+          <p:cNvPr id="14" name="TextBox 13"/>
+          <p:cNvSpPr txBox="1"/>
+          <p:nvPr/>
+        </p:nvSpPr>
+        <p:spPr>
+          <a:xfrm>
+            <a:off x="1874520" y="6784848"/>
+            <a:ext cx="6400800" cy="731520"/>
+          </a:xfrm>
+          <a:prstGeom prst="rect">
+            <a:avLst/>
+          </a:prstGeom>
+          <a:noFill/>
+        </p:spPr>
+        <p:txBody>
+          <a:bodyPr wrap="square" lIns="0" rIns="0" tIns="0" bIns="0">
+            <a:spAutoFit/>
+          </a:bodyPr>
+          <a:lstStyle/>
+          <a:p>
+            <a:pPr algn="l">
+              <a:lnSpc>
+                <a:spcPct val="130000"/>
+              </a:lnSpc>
+              <a:spcAft>
+                <a:spcPts val="0"/>
+              </a:spcAft>
+            </a:pPr>
+            <a:r>
+              <a:rPr sz="1600" b="0">
+                <a:solidFill>
+                  <a:srgbClr val="6B6B73"/>
+                </a:solidFill>
+                <a:latin typeface="Consolas"/>
+              </a:rPr>
+              <a:t>an interactive map + dead tests + untested lines</a:t>
+            </a:r>
+          </a:p>
+        </p:txBody>
+      </p:sp>
+      <p:sp>
+        <p:nvSpPr>
+          <p:cNvPr id="15" name="Rectangle 14"/>
+          <p:cNvSpPr/>
+          <p:nvPr/>
+        </p:nvSpPr>
+        <p:spPr>
+          <a:xfrm>
+            <a:off x="868680" y="7863840"/>
+            <a:ext cx="7406640" cy="19050"/>
+          </a:xfrm>
+          <a:prstGeom prst="rect">
+            <a:avLst/>
+          </a:prstGeom>
+          <a:solidFill>
+            <a:srgbClr val="DDDAD3"/>
+          </a:solidFill>
+          <a:ln>
+            <a:noFill/>
+          </a:ln>
+          <a:effectLst/>
+        </p:spPr>
+        <p:style>
+          <a:lnRef idx="1">
+            <a:schemeClr val="accent1"/>
+          </a:lnRef>
+          <a:fillRef idx="3">
+            <a:schemeClr val="accent1"/>
+          </a:fillRef>
+          <a:effectRef idx="2">
+            <a:schemeClr val="accent1"/>
+          </a:effectRef>
+          <a:fontRef idx="minor">
+            <a:schemeClr val="lt1"/>
+          </a:fontRef>
+        </p:style>
+        <p:txBody>
+          <a:bodyPr rtlCol="0" anchor="ctr"/>
+          <a:lstStyle/>
+          <a:p>
+            <a:pPr algn="ctr"/>
+          </a:p>
+        </p:txBody>
+      </p:sp>
+    </p:spTree>
+  </p:cSld>
+  <p:clrMapOvr>
+    <a:masterClrMapping/>
+  </p:clrMapOvr>
+</p:sld>
+</file>
+
+<file path=ppt/slides/slide5.xml><?xml version="1.0" encoding="utf-8"?>
+<p:sld xmlns:a="http://schemas.openxmlformats.org/drawingml/2006/main" xmlns:p="http://schemas.openxmlformats.org/presentationml/2006/main" xmlns:r="http://schemas.openxmlformats.org/officeDocument/2006/relationships">
+  <p:cSld>
+    <p:spTree>
+      <p:nvGrpSpPr>
+        <p:cNvPr id="1" name=""/>
+        <p:cNvGrpSpPr/>
+        <p:nvPr/>
+      </p:nvGrpSpPr>
+      <p:grpSpPr/>
+      <p:sp>
+        <p:nvSpPr>
+          <p:cNvPr id="2" name="Rectangle 1"/>
+          <p:cNvSpPr/>
+          <p:nvPr/>
+        </p:nvSpPr>
+        <p:spPr>
+          <a:xfrm>
+            <a:off x="0" y="0"/>
+            <a:ext cx="9144000" cy="9144000"/>
+          </a:xfrm>
+          <a:prstGeom prst="rect">
+            <a:avLst/>
+          </a:prstGeom>
+          <a:solidFill>
+            <a:srgbClr val="F6F5F2"/>
+          </a:solidFill>
+          <a:ln>
+            <a:noFill/>
+          </a:ln>
+          <a:effectLst/>
+        </p:spPr>
+        <p:style>
+          <a:lnRef idx="1">
+            <a:schemeClr val="accent1"/>
+          </a:lnRef>
+          <a:fillRef idx="3">
+            <a:schemeClr val="accent1"/>
+          </a:fillRef>
+          <a:effectRef idx="2">
+            <a:schemeClr val="accent1"/>
+          </a:effectRef>
+          <a:fontRef idx="minor">
+            <a:schemeClr val="lt1"/>
+          </a:fontRef>
+        </p:style>
+        <p:txBody>
+          <a:bodyPr rtlCol="0" anchor="ctr"/>
+          <a:lstStyle/>
+          <a:p>
+            <a:pPr algn="ctr"/>
+          </a:p>
+        </p:txBody>
+      </p:sp>
+      <p:sp>
+        <p:nvSpPr>
+          <p:cNvPr id="3" name="TextBox 2"/>
+          <p:cNvSpPr txBox="1"/>
+          <p:nvPr/>
+        </p:nvSpPr>
+        <p:spPr>
+          <a:xfrm>
+            <a:off x="868680" y="914400"/>
+            <a:ext cx="7406640" cy="1280160"/>
+          </a:xfrm>
+          <a:prstGeom prst="rect">
+            <a:avLst/>
+          </a:prstGeom>
+          <a:noFill/>
+        </p:spPr>
+        <p:txBody>
+          <a:bodyPr wrap="square" lIns="0" rIns="0" tIns="0" bIns="0">
+            <a:spAutoFit/>
+          </a:bodyPr>
+          <a:lstStyle/>
+          <a:p>
+            <a:pPr algn="ctr">
+              <a:lnSpc>
+                <a:spcPct val="110000"/>
+              </a:lnSpc>
+              <a:spcAft>
+                <a:spcPts val="0"/>
+              </a:spcAft>
+            </a:pPr>
+            <a:r>
+              <a:rPr sz="3000" b="1">
+                <a:solidFill>
+                  <a:srgbClr val="1B1B1E"/>
+                </a:solidFill>
+                <a:latin typeface="Consolas"/>
+              </a:rPr>
+              <a:t>Install Marrow</a:t>
+            </a:r>
+          </a:p>
+        </p:txBody>
+      </p:sp>
+      <p:sp>
+        <p:nvSpPr>
+          <p:cNvPr id="4" name="Rectangle 3"/>
+          <p:cNvSpPr/>
+          <p:nvPr/>
+        </p:nvSpPr>
+        <p:spPr>
+          <a:xfrm>
+            <a:off x="3840480" y="1874519"/>
+            <a:ext cx="1463040" cy="44450"/>
+          </a:xfrm>
+          <a:prstGeom prst="rect">
+            <a:avLst/>
+          </a:prstGeom>
+          <a:solidFill>
+            <a:srgbClr val="C2410C"/>
+          </a:solidFill>
+          <a:ln>
+            <a:noFill/>
+          </a:ln>
+          <a:effectLst/>
+        </p:spPr>
+        <p:style>
+          <a:lnRef idx="1">
+            <a:schemeClr val="accent1"/>
+          </a:lnRef>
+          <a:fillRef idx="3">
+            <a:schemeClr val="accent1"/>
+          </a:fillRef>
+          <a:effectRef idx="2">
+            <a:schemeClr val="accent1"/>
+          </a:effectRef>
+          <a:fontRef idx="minor">
+            <a:schemeClr val="lt1"/>
+          </a:fontRef>
+        </p:style>
+        <p:txBody>
+          <a:bodyPr rtlCol="0" anchor="ctr"/>
+          <a:lstStyle/>
+          <a:p>
+            <a:pPr algn="ctr"/>
+          </a:p>
+        </p:txBody>
+      </p:sp>
+      <p:sp>
+        <p:nvSpPr>
+          <p:cNvPr id="5" name="TextBox 4"/>
+          <p:cNvSpPr txBox="1"/>
+          <p:nvPr/>
+        </p:nvSpPr>
+        <p:spPr>
+          <a:xfrm>
+            <a:off x="868680" y="8366760"/>
+            <a:ext cx="7406640" cy="365760"/>
+          </a:xfrm>
+          <a:prstGeom prst="rect">
+            <a:avLst/>
+          </a:prstGeom>
+          <a:noFill/>
+        </p:spPr>
+        <p:txBody>
+          <a:bodyPr wrap="square" lIns="0" rIns="0" tIns="0" bIns="0">
+            <a:spAutoFit/>
+          </a:bodyPr>
+          <a:lstStyle/>
+          <a:p>
+            <a:pPr algn="l"/>
+            <a:r>
+              <a:rPr sz="1050">
+                <a:solidFill>
+                  <a:srgbClr val="6B6B73"/>
+                </a:solidFill>
+                <a:latin typeface="Consolas"/>
+              </a:rPr>
+              <a:t>get started</a:t>
+            </a:r>
+            <a:r>
+              <a:rPr sz="1050">
+                <a:solidFill>
+                  <a:srgbClr val="6B6B73"/>
+                </a:solidFill>
+                <a:latin typeface="Consolas"/>
+              </a:rPr>
+              <a:t>   ·   </a:t>
+            </a:r>
+            <a:r>
+              <a:rPr sz="1050">
+                <a:solidFill>
+                  <a:srgbClr val="C2410C"/>
+                </a:solidFill>
+                <a:latin typeface="Consolas"/>
+              </a:rPr>
+              <a:t>05</a:t>
+            </a:r>
+          </a:p>
+        </p:txBody>
+      </p:sp>
+      <p:sp>
+        <p:nvSpPr>
+          <p:cNvPr id="6" name="Rounded Rectangle 5"/>
+          <p:cNvSpPr/>
+          <p:nvPr/>
+        </p:nvSpPr>
+        <p:spPr>
+          <a:xfrm>
+            <a:off x="868680" y="3657600"/>
+            <a:ext cx="7406640" cy="1371600"/>
+          </a:xfrm>
+          <a:prstGeom prst="roundRect">
+            <a:avLst>
+              <a:gd name="adj" fmla="val 8000"/>
+            </a:avLst>
+          </a:prstGeom>
+          <a:solidFill>
+            <a:srgbClr val="1B1B1E"/>
+          </a:solidFill>
+          <a:ln>
+            <a:noFill/>
+          </a:ln>
+          <a:effectLst/>
+        </p:spPr>
+        <p:style>
+          <a:lnRef idx="1">
+            <a:schemeClr val="accent1"/>
+          </a:lnRef>
+          <a:fillRef idx="3">
+            <a:schemeClr val="accent1"/>
+          </a:fillRef>
+          <a:effectRef idx="2">
+            <a:schemeClr val="accent1"/>
+          </a:effectRef>
+          <a:fontRef idx="minor">
+            <a:schemeClr val="lt1"/>
+          </a:fontRef>
+        </p:style>
+        <p:txBody>
+          <a:bodyPr rtlCol="0" anchor="ctr" wrap="square"/>
+          <a:lstStyle/>
+          <a:p>
+            <a:pPr algn="ctr"/>
+            <a:r>
+              <a:rPr sz="2700" b="1">
+                <a:solidFill>
+                  <a:srgbClr val="C2410C"/>
+                </a:solidFill>
+                <a:latin typeface="Consolas"/>
+              </a:rPr>
+              <a:t>$ </a:t>
+            </a:r>
+            <a:r>
+              <a:rPr sz="2700" b="1">
+                <a:solidFill>
+                  <a:srgbClr val="F6F5F2"/>
+                </a:solidFill>
+                <a:latin typeface="Consolas"/>
+              </a:rPr>
+              <a:t>pipx install marrow</a:t>
+            </a:r>
+          </a:p>
+        </p:txBody>
+      </p:sp>
+      <p:sp>
+        <p:nvSpPr>
+          <p:cNvPr id="7" name="TextBox 6"/>
+          <p:cNvSpPr txBox="1"/>
+          <p:nvPr/>
+        </p:nvSpPr>
+        <p:spPr>
+          <a:xfrm>
+            <a:off x="868680" y="5577840"/>
+            <a:ext cx="7406640" cy="640080"/>
+          </a:xfrm>
+          <a:prstGeom prst="rect">
+            <a:avLst/>
+          </a:prstGeom>
+          <a:noFill/>
+        </p:spPr>
+        <p:txBody>
+          <a:bodyPr wrap="square" lIns="0" rIns="0" tIns="0" bIns="0">
+            <a:spAutoFit/>
+          </a:bodyPr>
+          <a:lstStyle/>
+          <a:p>
+            <a:pPr algn="ctr">
+              <a:lnSpc>
+                <a:spcPct val="125000"/>
+              </a:lnSpc>
+              <a:spcAft>
+                <a:spcPts val="0"/>
+              </a:spcAft>
+            </a:pPr>
+            <a:r>
               <a:rPr sz="2000" b="0">
                 <a:solidFill>
-                  <a:srgbClr val="6B6762"/>
+                  <a:srgbClr val="1B1B1E"/>
                 </a:solidFill>
                 <a:latin typeface="Consolas"/>
               </a:rPr>
               <a:t>Works with pytest, Jest, go test.</a:t>
+            </a:r>
+          </a:p>
+        </p:txBody>
+      </p:sp>
+      <p:sp>
+        <p:nvSpPr>
+          <p:cNvPr id="8" name="Rectangle 7"/>
+          <p:cNvSpPr/>
+          <p:nvPr/>
+        </p:nvSpPr>
+        <p:spPr>
+          <a:xfrm>
+            <a:off x="3840480" y="6492240"/>
+            <a:ext cx="1463040" cy="44450"/>
+          </a:xfrm>
+          <a:prstGeom prst="rect">
+            <a:avLst/>
+          </a:prstGeom>
+          <a:solidFill>
+            <a:srgbClr val="C2410C"/>
+          </a:solidFill>
+          <a:ln>
+            <a:noFill/>
+          </a:ln>
+          <a:effectLst/>
+        </p:spPr>
+        <p:style>
+          <a:lnRef idx="1">
+            <a:schemeClr val="accent1"/>
+          </a:lnRef>
+          <a:fillRef idx="3">
+            <a:schemeClr val="accent1"/>
+          </a:fillRef>
+          <a:effectRef idx="2">
+            <a:schemeClr val="accent1"/>
+          </a:effectRef>
+          <a:fontRef idx="minor">
+            <a:schemeClr val="lt1"/>
+          </a:fontRef>
+        </p:style>
+        <p:txBody>
+          <a:bodyPr rtlCol="0" anchor="ctr"/>
+          <a:lstStyle/>
+          <a:p>
+            <a:pPr algn="ctr"/>
+          </a:p>
+        </p:txBody>
+      </p:sp>
+      <p:sp>
+        <p:nvSpPr>
+          <p:cNvPr id="9" name="TextBox 8"/>
+          <p:cNvSpPr txBox="1"/>
+          <p:nvPr/>
+        </p:nvSpPr>
+        <p:spPr>
+          <a:xfrm>
+            <a:off x="868680" y="6949440"/>
+            <a:ext cx="7406640" cy="548640"/>
+          </a:xfrm>
+          <a:prstGeom prst="rect">
+            <a:avLst/>
+          </a:prstGeom>
+          <a:noFill/>
+        </p:spPr>
+        <p:txBody>
+          <a:bodyPr wrap="square" lIns="0" rIns="0" tIns="0" bIns="0">
+            <a:spAutoFit/>
+          </a:bodyPr>
+          <a:lstStyle/>
+          <a:p>
+            <a:pPr algn="ctr">
+              <a:lnSpc>
+                <a:spcPct val="125000"/>
+              </a:lnSpc>
+              <a:spcAft>
+                <a:spcPts val="0"/>
+              </a:spcAft>
+            </a:pPr>
+            <a:r>
+              <a:rPr sz="1600" b="0">
+                <a:solidFill>
+                  <a:srgbClr val="6B6B73"/>
+                </a:solidFill>
+                <a:latin typeface="Consolas"/>
+              </a:rPr>
+              <a:t>Know what your tests actually cover.</a:t>
             </a:r>
           </a:p>
         </p:txBody>
